--- a/docs/content/graphing_effectively/graphing_effectively_activity.pptx
+++ b/docs/content/graphing_effectively/graphing_effectively_activity.pptx
@@ -17,6 +17,9 @@
     <p:sldId id="265" r:id="rId11"/>
     <p:sldId id="266" r:id="rId12"/>
     <p:sldId id="267" r:id="rId13"/>
+    <p:sldId id="268" r:id="rId14"/>
+    <p:sldId id="269" r:id="rId15"/>
+    <p:sldId id="270" r:id="rId16"/>
   </p:sldIdLst>
   <p:sldSz cx="9144000" cy="5143500" type="screen16x9"/>
   <p:notesSz cx="6858000" cy="9144000"/>
@@ -3392,7 +3395,7 @@
             </a:pPr>
             <a:r>
               <a:rPr/>
-              <a:t>Part 8 · Save your figure</a:t>
+              <a:t>Part 6 · Facet by field team</a:t>
             </a:r>
           </a:p>
         </p:txBody>
@@ -3427,11 +3430,39 @@
             <a:r>
               <a:rPr>
                 <a:solidFill>
+                  <a:srgbClr val="003B4F"/>
+                </a:solidFill>
+                <a:latin typeface="Courier"/>
+              </a:rPr>
+              <a:t>pine_facet_plot &lt;- pine_box_plot </a:t>
+            </a:r>
+            <a:r>
+              <a:rPr>
+                <a:solidFill>
+                  <a:srgbClr val="5E5E5E"/>
+                </a:solidFill>
+                <a:latin typeface="Courier"/>
+              </a:rPr>
+              <a:t>+</a:t>
+            </a:r>
+            <a:br/>
+            <a:r>
+              <a:rPr>
+                <a:solidFill>
+                  <a:srgbClr val="003B4F"/>
+                </a:solidFill>
+                <a:latin typeface="Courier"/>
+              </a:rPr>
+              <a:t>  </a:t>
+            </a:r>
+            <a:r>
+              <a:rPr>
+                <a:solidFill>
                   <a:srgbClr val="4758AB"/>
                 </a:solidFill>
                 <a:latin typeface="Courier"/>
               </a:rPr>
-              <a:t>ggsave</a:t>
+              <a:t>facet_wrap</a:t>
             </a:r>
             <a:r>
               <a:rPr>
@@ -3442,34 +3473,25 @@
               </a:rPr>
               <a:t>(</a:t>
             </a:r>
+            <a:r>
+              <a:rPr>
+                <a:solidFill>
+                  <a:srgbClr val="5E5E5E"/>
+                </a:solidFill>
+                <a:latin typeface="Courier"/>
+              </a:rPr>
+              <a:t>~</a:t>
+            </a:r>
+            <a:r>
+              <a:rPr>
+                <a:solidFill>
+                  <a:srgbClr val="003B4F"/>
+                </a:solidFill>
+                <a:latin typeface="Courier"/>
+              </a:rPr>
+              <a:t>group)</a:t>
+            </a:r>
             <a:br/>
-            <a:r>
-              <a:rPr>
-                <a:solidFill>
-                  <a:srgbClr val="003B4F"/>
-                </a:solidFill>
-                <a:latin typeface="Courier"/>
-              </a:rPr>
-              <a:t>  </a:t>
-            </a:r>
-            <a:r>
-              <a:rPr>
-                <a:solidFill>
-                  <a:srgbClr val="20794D"/>
-                </a:solidFill>
-                <a:latin typeface="Courier"/>
-              </a:rPr>
-              <a:t>"figures/pine_needle_facet_boxplot.png"</a:t>
-            </a:r>
-            <a:r>
-              <a:rPr>
-                <a:solidFill>
-                  <a:srgbClr val="003B4F"/>
-                </a:solidFill>
-                <a:latin typeface="Courier"/>
-              </a:rPr>
-              <a:t>,</a:t>
-            </a:r>
             <a:br/>
             <a:r>
               <a:rPr>
@@ -3478,229 +3500,7 @@
                 </a:solidFill>
                 <a:latin typeface="Courier"/>
               </a:rPr>
-              <a:t>  </a:t>
-            </a:r>
-            <a:r>
-              <a:rPr>
-                <a:solidFill>
-                  <a:srgbClr val="657422"/>
-                </a:solidFill>
-                <a:latin typeface="Courier"/>
-              </a:rPr>
-              <a:t>plot   =</a:t>
-            </a:r>
-            <a:r>
-              <a:rPr>
-                <a:solidFill>
-                  <a:srgbClr val="003B4F"/>
-                </a:solidFill>
-                <a:latin typeface="Courier"/>
-              </a:rPr>
-              <a:t> pine_facet_plot,</a:t>
-            </a:r>
-            <a:br/>
-            <a:r>
-              <a:rPr>
-                <a:solidFill>
-                  <a:srgbClr val="003B4F"/>
-                </a:solidFill>
-                <a:latin typeface="Courier"/>
-              </a:rPr>
-              <a:t>  </a:t>
-            </a:r>
-            <a:r>
-              <a:rPr>
-                <a:solidFill>
-                  <a:srgbClr val="657422"/>
-                </a:solidFill>
-                <a:latin typeface="Courier"/>
-              </a:rPr>
-              <a:t>width  =</a:t>
-            </a:r>
-            <a:r>
-              <a:rPr>
-                <a:solidFill>
-                  <a:srgbClr val="003B4F"/>
-                </a:solidFill>
-                <a:latin typeface="Courier"/>
-              </a:rPr>
-              <a:t> </a:t>
-            </a:r>
-            <a:r>
-              <a:rPr>
-                <a:solidFill>
-                  <a:srgbClr val="AD0000"/>
-                </a:solidFill>
-                <a:latin typeface="Courier"/>
-              </a:rPr>
-              <a:t>3</a:t>
-            </a:r>
-            <a:r>
-              <a:rPr>
-                <a:solidFill>
-                  <a:srgbClr val="003B4F"/>
-                </a:solidFill>
-                <a:latin typeface="Courier"/>
-              </a:rPr>
-              <a:t>,</a:t>
-            </a:r>
-            <a:br/>
-            <a:r>
-              <a:rPr>
-                <a:solidFill>
-                  <a:srgbClr val="003B4F"/>
-                </a:solidFill>
-                <a:latin typeface="Courier"/>
-              </a:rPr>
-              <a:t>  </a:t>
-            </a:r>
-            <a:r>
-              <a:rPr>
-                <a:solidFill>
-                  <a:srgbClr val="657422"/>
-                </a:solidFill>
-                <a:latin typeface="Courier"/>
-              </a:rPr>
-              <a:t>height =</a:t>
-            </a:r>
-            <a:r>
-              <a:rPr>
-                <a:solidFill>
-                  <a:srgbClr val="003B4F"/>
-                </a:solidFill>
-                <a:latin typeface="Courier"/>
-              </a:rPr>
-              <a:t> </a:t>
-            </a:r>
-            <a:r>
-              <a:rPr>
-                <a:solidFill>
-                  <a:srgbClr val="AD0000"/>
-                </a:solidFill>
-                <a:latin typeface="Courier"/>
-              </a:rPr>
-              <a:t>3</a:t>
-            </a:r>
-            <a:r>
-              <a:rPr>
-                <a:solidFill>
-                  <a:srgbClr val="003B4F"/>
-                </a:solidFill>
-                <a:latin typeface="Courier"/>
-              </a:rPr>
-              <a:t>,</a:t>
-            </a:r>
-            <a:br/>
-            <a:r>
-              <a:rPr>
-                <a:solidFill>
-                  <a:srgbClr val="003B4F"/>
-                </a:solidFill>
-                <a:latin typeface="Courier"/>
-              </a:rPr>
-              <a:t>  </a:t>
-            </a:r>
-            <a:r>
-              <a:rPr>
-                <a:solidFill>
-                  <a:srgbClr val="657422"/>
-                </a:solidFill>
-                <a:latin typeface="Courier"/>
-              </a:rPr>
-              <a:t>units  =</a:t>
-            </a:r>
-            <a:r>
-              <a:rPr>
-                <a:solidFill>
-                  <a:srgbClr val="003B4F"/>
-                </a:solidFill>
-                <a:latin typeface="Courier"/>
-              </a:rPr>
-              <a:t> </a:t>
-            </a:r>
-            <a:r>
-              <a:rPr>
-                <a:solidFill>
-                  <a:srgbClr val="20794D"/>
-                </a:solidFill>
-                <a:latin typeface="Courier"/>
-              </a:rPr>
-              <a:t>"in"</a:t>
-            </a:r>
-            <a:r>
-              <a:rPr>
-                <a:solidFill>
-                  <a:srgbClr val="003B4F"/>
-                </a:solidFill>
-                <a:latin typeface="Courier"/>
-              </a:rPr>
-              <a:t>,</a:t>
-            </a:r>
-            <a:br/>
-            <a:r>
-              <a:rPr>
-                <a:solidFill>
-                  <a:srgbClr val="003B4F"/>
-                </a:solidFill>
-                <a:latin typeface="Courier"/>
-              </a:rPr>
-              <a:t>  </a:t>
-            </a:r>
-            <a:r>
-              <a:rPr>
-                <a:solidFill>
-                  <a:srgbClr val="657422"/>
-                </a:solidFill>
-                <a:latin typeface="Courier"/>
-              </a:rPr>
-              <a:t>dpi    =</a:t>
-            </a:r>
-            <a:r>
-              <a:rPr>
-                <a:solidFill>
-                  <a:srgbClr val="003B4F"/>
-                </a:solidFill>
-                <a:latin typeface="Courier"/>
-              </a:rPr>
-              <a:t> </a:t>
-            </a:r>
-            <a:r>
-              <a:rPr>
-                <a:solidFill>
-                  <a:srgbClr val="AD0000"/>
-                </a:solidFill>
-                <a:latin typeface="Courier"/>
-              </a:rPr>
-              <a:t>300</a:t>
-            </a:r>
-            <a:br/>
-            <a:r>
-              <a:rPr>
-                <a:solidFill>
-                  <a:srgbClr val="003B4F"/>
-                </a:solidFill>
-                <a:latin typeface="Courier"/>
-              </a:rPr>
-              <a:t>)</a:t>
-            </a:r>
-          </a:p>
-          <a:p>
-            <a:pPr lvl="0" indent="0" marL="0">
-              <a:buNone/>
-            </a:pPr>
-            <a:r>
-              <a:rPr/>
-              <a:t>Check your </a:t>
-            </a:r>
-            <a:r>
-              <a:rPr>
-                <a:latin typeface="Courier"/>
-              </a:rPr>
-              <a:t>figures/</a:t>
-            </a:r>
-            <a:r>
-              <a:rPr/>
-              <a:t> folder — the PNG should be there.</a:t>
+              <a:t>pine_facet_plot</a:t>
             </a:r>
           </a:p>
           <a:p>
@@ -3717,27 +3517,7 @@
             </a:r>
             <a:r>
               <a:rPr/>
-              <a:t> What are the four arguments (besides the filename and </a:t>
-            </a:r>
-            <a:r>
-              <a:rPr>
-                <a:latin typeface="Courier"/>
-              </a:rPr>
-              <a:t>plot =</a:t>
-            </a:r>
-            <a:r>
-              <a:rPr/>
-              <a:t>) you should always set explicitly in </a:t>
-            </a:r>
-            <a:r>
-              <a:rPr>
-                <a:latin typeface="Courier"/>
-              </a:rPr>
-              <a:t>ggsave()</a:t>
-            </a:r>
-            <a:r>
-              <a:rPr/>
-              <a:t>? </a:t>
+              <a:t> Looking at the four panels, does every field team show the same lee-vs-windward pattern, or does one team look different? </a:t>
             </a:r>
             <a:r>
               <a:rPr>
@@ -3795,7 +3575,7 @@
             </a:pPr>
             <a:r>
               <a:rPr/>
-              <a:t>Part 9 · Review and checkpoint</a:t>
+              <a:t>Part 7 · Pick a theme</a:t>
             </a:r>
           </a:p>
         </p:txBody>
@@ -3819,108 +3599,150 @@
               <a:buNone/>
             </a:pPr>
             <a:r>
-              <a:rPr/>
-              <a:t>At this point you can:</a:t>
-            </a:r>
-          </a:p>
-          <a:p>
-            <a:pPr lvl="0"/>
-            <a:r>
-              <a:rPr/>
-              <a:t>☐ Build a boxplot with raw points overlaid</a:t>
-            </a:r>
-          </a:p>
-          <a:p>
-            <a:pPr lvl="0"/>
-            <a:r>
-              <a:rPr/>
-              <a:t>☐ Map a third variable using </a:t>
-            </a:r>
-            <a:r>
-              <a:rPr>
-                <a:latin typeface="Courier"/>
-              </a:rPr>
-              <a:t>color =</a:t>
-            </a:r>
-            <a:r>
-              <a:rPr/>
-              <a:t> or </a:t>
-            </a:r>
-            <a:r>
-              <a:rPr>
-                <a:latin typeface="Courier"/>
-              </a:rPr>
-              <a:t>fill =</a:t>
-            </a:r>
-            <a:r>
-              <a:rPr/>
-              <a:t> inside </a:t>
-            </a:r>
-            <a:r>
-              <a:rPr>
-                <a:latin typeface="Courier"/>
-              </a:rPr>
-              <a:t>aes()</a:t>
-            </a:r>
-          </a:p>
-          <a:p>
-            <a:pPr lvl="0"/>
-            <a:r>
-              <a:rPr/>
-              <a:t>☐ Plot mean ± SE directly with </a:t>
-            </a:r>
-            <a:r>
-              <a:rPr>
-                <a:latin typeface="Courier"/>
-              </a:rPr>
-              <a:t>stat_summary()</a:t>
-            </a:r>
-          </a:p>
-          <a:p>
-            <a:pPr lvl="0"/>
-            <a:r>
-              <a:rPr/>
-              <a:t>☐ Facet a plot with </a:t>
-            </a:r>
-            <a:r>
-              <a:rPr>
-                <a:latin typeface="Courier"/>
-              </a:rPr>
-              <a:t>facet_wrap()</a:t>
-            </a:r>
-            <a:r>
-              <a:rPr/>
-              <a:t> to compare every group at once</a:t>
-            </a:r>
-          </a:p>
-          <a:p>
-            <a:pPr lvl="0"/>
-            <a:r>
-              <a:rPr/>
-              <a:t>☐ Compare at least two </a:t>
-            </a:r>
-            <a:r>
-              <a:rPr>
-                <a:latin typeface="Courier"/>
-              </a:rPr>
-              <a:t>ggplot</a:t>
-            </a:r>
-            <a:r>
-              <a:rPr/>
-              <a:t> themes</a:t>
-            </a:r>
-          </a:p>
-          <a:p>
-            <a:pPr lvl="0"/>
-            <a:r>
-              <a:rPr/>
-              <a:t>☐ Save a figure at an explicit width, height, units, and dpi with </a:t>
-            </a:r>
-            <a:r>
-              <a:rPr>
-                <a:latin typeface="Courier"/>
-              </a:rPr>
-              <a:t>ggsave()</a:t>
+              <a:rPr b="1"/>
+              <a:t>▶ Run this — try each one:</a:t>
+            </a:r>
+          </a:p>
+          <a:p>
+            <a:pPr lvl="0" indent="0">
+              <a:buNone/>
+            </a:pPr>
+            <a:r>
+              <a:rPr>
+                <a:solidFill>
+                  <a:srgbClr val="003B4F"/>
+                </a:solidFill>
+                <a:latin typeface="Courier"/>
+              </a:rPr>
+              <a:t>pine_jitter_plot </a:t>
+            </a:r>
+            <a:r>
+              <a:rPr>
+                <a:solidFill>
+                  <a:srgbClr val="5E5E5E"/>
+                </a:solidFill>
+                <a:latin typeface="Courier"/>
+              </a:rPr>
+              <a:t>+</a:t>
+            </a:r>
+            <a:r>
+              <a:rPr>
+                <a:solidFill>
+                  <a:srgbClr val="003B4F"/>
+                </a:solidFill>
+                <a:latin typeface="Courier"/>
+              </a:rPr>
+              <a:t> </a:t>
+            </a:r>
+            <a:r>
+              <a:rPr>
+                <a:solidFill>
+                  <a:srgbClr val="4758AB"/>
+                </a:solidFill>
+                <a:latin typeface="Courier"/>
+              </a:rPr>
+              <a:t>theme_bw</a:t>
+            </a:r>
+            <a:r>
+              <a:rPr>
+                <a:solidFill>
+                  <a:srgbClr val="003B4F"/>
+                </a:solidFill>
+                <a:latin typeface="Courier"/>
+              </a:rPr>
+              <a:t>()</a:t>
+            </a:r>
+            <a:br/>
+            <a:r>
+              <a:rPr>
+                <a:solidFill>
+                  <a:srgbClr val="003B4F"/>
+                </a:solidFill>
+                <a:latin typeface="Courier"/>
+              </a:rPr>
+              <a:t>pine_jitter_plot </a:t>
+            </a:r>
+            <a:r>
+              <a:rPr>
+                <a:solidFill>
+                  <a:srgbClr val="5E5E5E"/>
+                </a:solidFill>
+                <a:latin typeface="Courier"/>
+              </a:rPr>
+              <a:t>+</a:t>
+            </a:r>
+            <a:r>
+              <a:rPr>
+                <a:solidFill>
+                  <a:srgbClr val="003B4F"/>
+                </a:solidFill>
+                <a:latin typeface="Courier"/>
+              </a:rPr>
+              <a:t> </a:t>
+            </a:r>
+            <a:r>
+              <a:rPr>
+                <a:solidFill>
+                  <a:srgbClr val="4758AB"/>
+                </a:solidFill>
+                <a:latin typeface="Courier"/>
+              </a:rPr>
+              <a:t>theme_classic</a:t>
+            </a:r>
+            <a:r>
+              <a:rPr>
+                <a:solidFill>
+                  <a:srgbClr val="003B4F"/>
+                </a:solidFill>
+                <a:latin typeface="Courier"/>
+              </a:rPr>
+              <a:t>()</a:t>
+            </a:r>
+            <a:br/>
+            <a:r>
+              <a:rPr>
+                <a:solidFill>
+                  <a:srgbClr val="003B4F"/>
+                </a:solidFill>
+                <a:latin typeface="Courier"/>
+              </a:rPr>
+              <a:t>pine_jitter_plot </a:t>
+            </a:r>
+            <a:r>
+              <a:rPr>
+                <a:solidFill>
+                  <a:srgbClr val="5E5E5E"/>
+                </a:solidFill>
+                <a:latin typeface="Courier"/>
+              </a:rPr>
+              <a:t>+</a:t>
+            </a:r>
+            <a:r>
+              <a:rPr>
+                <a:solidFill>
+                  <a:srgbClr val="003B4F"/>
+                </a:solidFill>
+                <a:latin typeface="Courier"/>
+              </a:rPr>
+              <a:t> </a:t>
+            </a:r>
+            <a:r>
+              <a:rPr>
+                <a:solidFill>
+                  <a:srgbClr val="4758AB"/>
+                </a:solidFill>
+                <a:latin typeface="Courier"/>
+              </a:rPr>
+              <a:t>theme_minimal</a:t>
+            </a:r>
+            <a:r>
+              <a:rPr>
+                <a:solidFill>
+                  <a:srgbClr val="003B4F"/>
+                </a:solidFill>
+                <a:latin typeface="Courier"/>
+              </a:rPr>
+              <a:t>()</a:t>
             </a:r>
           </a:p>
           <a:p>
@@ -3933,98 +3755,17 @@
             </a:r>
             <a:r>
               <a:rPr b="1"/>
-              <a:t>Your turn — before you move on:</a:t>
+              <a:t>Your turn:</a:t>
             </a:r>
             <a:r>
               <a:rPr/>
-              <a:t> Run your whole script top to bottom. Ran cleanly? </a:t>
-            </a:r>
-            <a:r>
-              <a:rPr>
-                <a:latin typeface="Courier"/>
-              </a:rPr>
-              <a:t>Y / N</a:t>
-            </a:r>
-            <a:r>
-              <a:rPr/>
-              <a:t> — if not, the error was: </a:t>
+              <a:t> Which theme do you like best for this kind of biological comparison? Why? </a:t>
             </a:r>
             <a:r>
               <a:rPr>
                 <a:latin typeface="Courier"/>
               </a:rPr>
               <a:t>________________________</a:t>
-            </a:r>
-          </a:p>
-          <a:p>
-            <a:pPr lvl="0" indent="0" marL="1270000">
-              <a:buNone/>
-            </a:pPr>
-            <a:r>
-              <a:rPr sz="2000" b="1"/>
-              <a:t>Note</a:t>
-            </a:r>
-          </a:p>
-          <a:p>
-            <a:pPr lvl="0" indent="0" marL="1270000">
-              <a:buNone/>
-            </a:pPr>
-            <a:r>
-              <a:rPr sz="2000" b="1"/>
-              <a:t>📤 What to turn in before next class</a:t>
-            </a:r>
-          </a:p>
-          <a:p>
-            <a:pPr lvl="0" indent="0" marL="1270000">
-              <a:buNone/>
-            </a:pPr>
-            <a:r>
-              <a:rPr sz="2000"/>
-              <a:t>Upload both of these to the course management system:</a:t>
-            </a:r>
-          </a:p>
-          <a:p>
-            <a:pPr lvl="0" indent="-342900" marL="342900">
-              <a:buAutoNum type="arabicPeriod"/>
-            </a:pPr>
-            <a:r>
-              <a:rPr sz="2000"/>
-              <a:t>Your code — the </a:t>
-            </a:r>
-            <a:r>
-              <a:rPr sz="2000">
-                <a:latin typeface="Courier"/>
-              </a:rPr>
-              <a:t>scripts/</a:t>
-            </a:r>
-            <a:r>
-              <a:rPr sz="2000"/>
-              <a:t> folder (or just </a:t>
-            </a:r>
-            <a:r>
-              <a:rPr sz="2000">
-                <a:latin typeface="Courier"/>
-              </a:rPr>
-              <a:t>04_graphing_effectively.R</a:t>
-            </a:r>
-            <a:r>
-              <a:rPr sz="2000"/>
-              <a:t>) and the saved figure in </a:t>
-            </a:r>
-            <a:r>
-              <a:rPr sz="2000">
-                <a:latin typeface="Courier"/>
-              </a:rPr>
-              <a:t>figures/</a:t>
-            </a:r>
-          </a:p>
-          <a:p>
-            <a:pPr lvl="0" indent="-342900" marL="342900">
-              <a:buAutoNum type="arabicPeriod"/>
-            </a:pPr>
-            <a:r>
-              <a:rPr sz="2000"/>
-              <a:t>This worksheet, with your written answers</a:t>
             </a:r>
           </a:p>
         </p:txBody>
@@ -4076,6 +3817,2630 @@
             </a:pPr>
             <a:r>
               <a:rPr/>
+              <a:t>Part 8 · Save your figure</a:t>
+            </a:r>
+          </a:p>
+        </p:txBody>
+      </p:sp>
+      <p:sp>
+        <p:nvSpPr>
+          <p:cNvPr id="3" name="Content Placeholder 2"/>
+          <p:cNvSpPr>
+            <a:spLocks noGrp="1"/>
+          </p:cNvSpPr>
+          <p:nvPr>
+            <p:ph idx="1"/>
+          </p:nvPr>
+        </p:nvSpPr>
+        <p:spPr/>
+        <p:txBody>
+          <a:bodyPr/>
+          <a:lstStyle/>
+          <a:p>
+            <a:pPr lvl="0" indent="0" marL="0">
+              <a:buNone/>
+            </a:pPr>
+            <a:r>
+              <a:rPr b="1"/>
+              <a:t>▶ Run this:</a:t>
+            </a:r>
+          </a:p>
+          <a:p>
+            <a:pPr lvl="0" indent="0">
+              <a:buNone/>
+            </a:pPr>
+            <a:r>
+              <a:rPr>
+                <a:solidFill>
+                  <a:srgbClr val="4758AB"/>
+                </a:solidFill>
+                <a:latin typeface="Courier"/>
+              </a:rPr>
+              <a:t>ggsave</a:t>
+            </a:r>
+            <a:r>
+              <a:rPr>
+                <a:solidFill>
+                  <a:srgbClr val="003B4F"/>
+                </a:solidFill>
+                <a:latin typeface="Courier"/>
+              </a:rPr>
+              <a:t>(</a:t>
+            </a:r>
+            <a:br/>
+            <a:r>
+              <a:rPr>
+                <a:solidFill>
+                  <a:srgbClr val="003B4F"/>
+                </a:solidFill>
+                <a:latin typeface="Courier"/>
+              </a:rPr>
+              <a:t>  </a:t>
+            </a:r>
+            <a:r>
+              <a:rPr>
+                <a:solidFill>
+                  <a:srgbClr val="20794D"/>
+                </a:solidFill>
+                <a:latin typeface="Courier"/>
+              </a:rPr>
+              <a:t>"figures/pine_needle_facet_boxplot.png"</a:t>
+            </a:r>
+            <a:r>
+              <a:rPr>
+                <a:solidFill>
+                  <a:srgbClr val="003B4F"/>
+                </a:solidFill>
+                <a:latin typeface="Courier"/>
+              </a:rPr>
+              <a:t>,</a:t>
+            </a:r>
+            <a:br/>
+            <a:r>
+              <a:rPr>
+                <a:solidFill>
+                  <a:srgbClr val="003B4F"/>
+                </a:solidFill>
+                <a:latin typeface="Courier"/>
+              </a:rPr>
+              <a:t>  </a:t>
+            </a:r>
+            <a:r>
+              <a:rPr>
+                <a:solidFill>
+                  <a:srgbClr val="657422"/>
+                </a:solidFill>
+                <a:latin typeface="Courier"/>
+              </a:rPr>
+              <a:t>plot   =</a:t>
+            </a:r>
+            <a:r>
+              <a:rPr>
+                <a:solidFill>
+                  <a:srgbClr val="003B4F"/>
+                </a:solidFill>
+                <a:latin typeface="Courier"/>
+              </a:rPr>
+              <a:t> pine_facet_plot,</a:t>
+            </a:r>
+            <a:br/>
+            <a:r>
+              <a:rPr>
+                <a:solidFill>
+                  <a:srgbClr val="003B4F"/>
+                </a:solidFill>
+                <a:latin typeface="Courier"/>
+              </a:rPr>
+              <a:t>  </a:t>
+            </a:r>
+            <a:r>
+              <a:rPr>
+                <a:solidFill>
+                  <a:srgbClr val="657422"/>
+                </a:solidFill>
+                <a:latin typeface="Courier"/>
+              </a:rPr>
+              <a:t>width  =</a:t>
+            </a:r>
+            <a:r>
+              <a:rPr>
+                <a:solidFill>
+                  <a:srgbClr val="003B4F"/>
+                </a:solidFill>
+                <a:latin typeface="Courier"/>
+              </a:rPr>
+              <a:t> </a:t>
+            </a:r>
+            <a:r>
+              <a:rPr>
+                <a:solidFill>
+                  <a:srgbClr val="AD0000"/>
+                </a:solidFill>
+                <a:latin typeface="Courier"/>
+              </a:rPr>
+              <a:t>3</a:t>
+            </a:r>
+            <a:r>
+              <a:rPr>
+                <a:solidFill>
+                  <a:srgbClr val="003B4F"/>
+                </a:solidFill>
+                <a:latin typeface="Courier"/>
+              </a:rPr>
+              <a:t>,</a:t>
+            </a:r>
+            <a:br/>
+            <a:r>
+              <a:rPr>
+                <a:solidFill>
+                  <a:srgbClr val="003B4F"/>
+                </a:solidFill>
+                <a:latin typeface="Courier"/>
+              </a:rPr>
+              <a:t>  </a:t>
+            </a:r>
+            <a:r>
+              <a:rPr>
+                <a:solidFill>
+                  <a:srgbClr val="657422"/>
+                </a:solidFill>
+                <a:latin typeface="Courier"/>
+              </a:rPr>
+              <a:t>height =</a:t>
+            </a:r>
+            <a:r>
+              <a:rPr>
+                <a:solidFill>
+                  <a:srgbClr val="003B4F"/>
+                </a:solidFill>
+                <a:latin typeface="Courier"/>
+              </a:rPr>
+              <a:t> </a:t>
+            </a:r>
+            <a:r>
+              <a:rPr>
+                <a:solidFill>
+                  <a:srgbClr val="AD0000"/>
+                </a:solidFill>
+                <a:latin typeface="Courier"/>
+              </a:rPr>
+              <a:t>3</a:t>
+            </a:r>
+            <a:r>
+              <a:rPr>
+                <a:solidFill>
+                  <a:srgbClr val="003B4F"/>
+                </a:solidFill>
+                <a:latin typeface="Courier"/>
+              </a:rPr>
+              <a:t>,</a:t>
+            </a:r>
+            <a:br/>
+            <a:r>
+              <a:rPr>
+                <a:solidFill>
+                  <a:srgbClr val="003B4F"/>
+                </a:solidFill>
+                <a:latin typeface="Courier"/>
+              </a:rPr>
+              <a:t>  </a:t>
+            </a:r>
+            <a:r>
+              <a:rPr>
+                <a:solidFill>
+                  <a:srgbClr val="657422"/>
+                </a:solidFill>
+                <a:latin typeface="Courier"/>
+              </a:rPr>
+              <a:t>units  =</a:t>
+            </a:r>
+            <a:r>
+              <a:rPr>
+                <a:solidFill>
+                  <a:srgbClr val="003B4F"/>
+                </a:solidFill>
+                <a:latin typeface="Courier"/>
+              </a:rPr>
+              <a:t> </a:t>
+            </a:r>
+            <a:r>
+              <a:rPr>
+                <a:solidFill>
+                  <a:srgbClr val="20794D"/>
+                </a:solidFill>
+                <a:latin typeface="Courier"/>
+              </a:rPr>
+              <a:t>"in"</a:t>
+            </a:r>
+            <a:r>
+              <a:rPr>
+                <a:solidFill>
+                  <a:srgbClr val="003B4F"/>
+                </a:solidFill>
+                <a:latin typeface="Courier"/>
+              </a:rPr>
+              <a:t>,</a:t>
+            </a:r>
+            <a:br/>
+            <a:r>
+              <a:rPr>
+                <a:solidFill>
+                  <a:srgbClr val="003B4F"/>
+                </a:solidFill>
+                <a:latin typeface="Courier"/>
+              </a:rPr>
+              <a:t>  </a:t>
+            </a:r>
+            <a:r>
+              <a:rPr>
+                <a:solidFill>
+                  <a:srgbClr val="657422"/>
+                </a:solidFill>
+                <a:latin typeface="Courier"/>
+              </a:rPr>
+              <a:t>dpi    =</a:t>
+            </a:r>
+            <a:r>
+              <a:rPr>
+                <a:solidFill>
+                  <a:srgbClr val="003B4F"/>
+                </a:solidFill>
+                <a:latin typeface="Courier"/>
+              </a:rPr>
+              <a:t> </a:t>
+            </a:r>
+            <a:r>
+              <a:rPr>
+                <a:solidFill>
+                  <a:srgbClr val="AD0000"/>
+                </a:solidFill>
+                <a:latin typeface="Courier"/>
+              </a:rPr>
+              <a:t>300</a:t>
+            </a:r>
+            <a:br/>
+            <a:r>
+              <a:rPr>
+                <a:solidFill>
+                  <a:srgbClr val="003B4F"/>
+                </a:solidFill>
+                <a:latin typeface="Courier"/>
+              </a:rPr>
+              <a:t>)</a:t>
+            </a:r>
+          </a:p>
+          <a:p>
+            <a:pPr lvl="0" indent="0" marL="0">
+              <a:buNone/>
+            </a:pPr>
+            <a:r>
+              <a:rPr/>
+              <a:t>Check your </a:t>
+            </a:r>
+            <a:r>
+              <a:rPr>
+                <a:latin typeface="Courier"/>
+              </a:rPr>
+              <a:t>figures/</a:t>
+            </a:r>
+            <a:r>
+              <a:rPr/>
+              <a:t> folder — the PNG should be there.</a:t>
+            </a:r>
+          </a:p>
+          <a:p>
+            <a:pPr lvl="0" indent="0" marL="0">
+              <a:buNone/>
+            </a:pPr>
+            <a:r>
+              <a:rPr/>
+              <a:t>✏️ </a:t>
+            </a:r>
+            <a:r>
+              <a:rPr b="1"/>
+              <a:t>Your turn:</a:t>
+            </a:r>
+            <a:r>
+              <a:rPr/>
+              <a:t> What are the four arguments (besides the filename and </a:t>
+            </a:r>
+            <a:r>
+              <a:rPr>
+                <a:latin typeface="Courier"/>
+              </a:rPr>
+              <a:t>plot =</a:t>
+            </a:r>
+            <a:r>
+              <a:rPr/>
+              <a:t>) you should always set explicitly in </a:t>
+            </a:r>
+            <a:r>
+              <a:rPr>
+                <a:latin typeface="Courier"/>
+              </a:rPr>
+              <a:t>ggsave()</a:t>
+            </a:r>
+            <a:r>
+              <a:rPr/>
+              <a:t>? </a:t>
+            </a:r>
+            <a:r>
+              <a:rPr>
+                <a:latin typeface="Courier"/>
+              </a:rPr>
+              <a:t>________________________</a:t>
+            </a:r>
+          </a:p>
+        </p:txBody>
+      </p:sp>
+    </p:spTree>
+  </p:cSld>
+</p:sld>
+</file>
+
+<file path=ppt/slides/slide13.xml><?xml version="1.0" encoding="utf-8"?>
+<p:sld xmlns:a="http://schemas.openxmlformats.org/drawingml/2006/main" xmlns:r="http://schemas.openxmlformats.org/officeDocument/2006/relationships" xmlns:p="http://schemas.openxmlformats.org/presentationml/2006/main">
+  <p:cSld>
+    <p:spTree>
+      <p:nvGrpSpPr>
+        <p:cNvPr id="1" name=""/>
+        <p:cNvGrpSpPr/>
+        <p:nvPr/>
+      </p:nvGrpSpPr>
+      <p:grpSpPr>
+        <a:xfrm>
+          <a:off x="0" y="0"/>
+          <a:ext cx="0" cy="0"/>
+          <a:chOff x="0" y="0"/>
+          <a:chExt cx="0" cy="0"/>
+        </a:xfrm>
+      </p:grpSpPr>
+      <p:sp>
+        <p:nvSpPr>
+          <p:cNvPr id="2" name="Title 1"/>
+          <p:cNvSpPr>
+            <a:spLocks noGrp="1"/>
+          </p:cNvSpPr>
+          <p:nvPr>
+            <p:ph type="title"/>
+          </p:nvPr>
+        </p:nvSpPr>
+        <p:spPr>
+          <a:xfrm>
+            <a:off x="0" y="0"/>
+            <a:ext cx="9144000" cy="582780"/>
+          </a:xfrm>
+        </p:spPr>
+        <p:txBody>
+          <a:bodyPr/>
+          <a:lstStyle/>
+          <a:p>
+            <a:pPr lvl="0" indent="0" marL="0">
+              <a:buNone/>
+            </a:pPr>
+            <a:r>
+              <a:rPr/>
+              <a:t>Part 8b · Advanced / extra work — </a:t>
+            </a:r>
+            <a:r>
+              <a:rPr>
+                <a:latin typeface="Courier"/>
+              </a:rPr>
+              <a:t>scale_color_manual()</a:t>
+            </a:r>
+          </a:p>
+        </p:txBody>
+      </p:sp>
+      <p:sp>
+        <p:nvSpPr>
+          <p:cNvPr id="3" name="Content Placeholder 2"/>
+          <p:cNvSpPr>
+            <a:spLocks noGrp="1"/>
+          </p:cNvSpPr>
+          <p:nvPr>
+            <p:ph idx="1"/>
+          </p:nvPr>
+        </p:nvSpPr>
+        <p:spPr/>
+        <p:txBody>
+          <a:bodyPr/>
+          <a:lstStyle/>
+          <a:p>
+            <a:pPr lvl="0" indent="0" marL="1270000">
+              <a:buNone/>
+            </a:pPr>
+            <a:r>
+              <a:rPr sz="2000" b="1"/>
+              <a:t>Tip</a:t>
+            </a:r>
+          </a:p>
+          <a:p>
+            <a:pPr lvl="0" indent="0" marL="1270000">
+              <a:buNone/>
+            </a:pPr>
+            <a:r>
+              <a:rPr sz="2000" b="1"/>
+              <a:t>🚀 This part is optional bonus material.</a:t>
+            </a:r>
+            <a:r>
+              <a:rPr sz="2000"/>
+              <a:t> Everything through Part 8 covers the required skills for this module.</a:t>
+            </a:r>
+          </a:p>
+          <a:p>
+            <a:pPr lvl="0" indent="0" marL="0">
+              <a:buNone/>
+            </a:pPr>
+            <a:r>
+              <a:rPr b="1"/>
+              <a:t>▶ Run this:</a:t>
+            </a:r>
+          </a:p>
+          <a:p>
+            <a:pPr lvl="0" indent="0">
+              <a:buNone/>
+            </a:pPr>
+            <a:r>
+              <a:rPr>
+                <a:solidFill>
+                  <a:srgbClr val="4758AB"/>
+                </a:solidFill>
+                <a:latin typeface="Courier"/>
+              </a:rPr>
+              <a:t>ggplot</a:t>
+            </a:r>
+            <a:r>
+              <a:rPr>
+                <a:solidFill>
+                  <a:srgbClr val="003B4F"/>
+                </a:solidFill>
+                <a:latin typeface="Courier"/>
+              </a:rPr>
+              <a:t>(pine_df, </a:t>
+            </a:r>
+            <a:r>
+              <a:rPr>
+                <a:solidFill>
+                  <a:srgbClr val="4758AB"/>
+                </a:solidFill>
+                <a:latin typeface="Courier"/>
+              </a:rPr>
+              <a:t>aes</a:t>
+            </a:r>
+            <a:r>
+              <a:rPr>
+                <a:solidFill>
+                  <a:srgbClr val="003B4F"/>
+                </a:solidFill>
+                <a:latin typeface="Courier"/>
+              </a:rPr>
+              <a:t>(</a:t>
+            </a:r>
+            <a:r>
+              <a:rPr>
+                <a:solidFill>
+                  <a:srgbClr val="657422"/>
+                </a:solidFill>
+                <a:latin typeface="Courier"/>
+              </a:rPr>
+              <a:t>x =</a:t>
+            </a:r>
+            <a:r>
+              <a:rPr>
+                <a:solidFill>
+                  <a:srgbClr val="003B4F"/>
+                </a:solidFill>
+                <a:latin typeface="Courier"/>
+              </a:rPr>
+              <a:t> n_s, </a:t>
+            </a:r>
+            <a:r>
+              <a:rPr>
+                <a:solidFill>
+                  <a:srgbClr val="657422"/>
+                </a:solidFill>
+                <a:latin typeface="Courier"/>
+              </a:rPr>
+              <a:t>y =</a:t>
+            </a:r>
+            <a:r>
+              <a:rPr>
+                <a:solidFill>
+                  <a:srgbClr val="003B4F"/>
+                </a:solidFill>
+                <a:latin typeface="Courier"/>
+              </a:rPr>
+              <a:t> length_mm, </a:t>
+            </a:r>
+            <a:r>
+              <a:rPr>
+                <a:solidFill>
+                  <a:srgbClr val="657422"/>
+                </a:solidFill>
+                <a:latin typeface="Courier"/>
+              </a:rPr>
+              <a:t>color =</a:t>
+            </a:r>
+            <a:r>
+              <a:rPr>
+                <a:solidFill>
+                  <a:srgbClr val="003B4F"/>
+                </a:solidFill>
+                <a:latin typeface="Courier"/>
+              </a:rPr>
+              <a:t> n_s)) </a:t>
+            </a:r>
+            <a:r>
+              <a:rPr>
+                <a:solidFill>
+                  <a:srgbClr val="5E5E5E"/>
+                </a:solidFill>
+                <a:latin typeface="Courier"/>
+              </a:rPr>
+              <a:t>+</a:t>
+            </a:r>
+            <a:br/>
+            <a:r>
+              <a:rPr>
+                <a:solidFill>
+                  <a:srgbClr val="003B4F"/>
+                </a:solidFill>
+                <a:latin typeface="Courier"/>
+              </a:rPr>
+              <a:t>  </a:t>
+            </a:r>
+            <a:r>
+              <a:rPr>
+                <a:solidFill>
+                  <a:srgbClr val="4758AB"/>
+                </a:solidFill>
+                <a:latin typeface="Courier"/>
+              </a:rPr>
+              <a:t>geom_point</a:t>
+            </a:r>
+            <a:r>
+              <a:rPr>
+                <a:solidFill>
+                  <a:srgbClr val="003B4F"/>
+                </a:solidFill>
+                <a:latin typeface="Courier"/>
+              </a:rPr>
+              <a:t>(</a:t>
+            </a:r>
+            <a:r>
+              <a:rPr>
+                <a:solidFill>
+                  <a:srgbClr val="657422"/>
+                </a:solidFill>
+                <a:latin typeface="Courier"/>
+              </a:rPr>
+              <a:t>position =</a:t>
+            </a:r>
+            <a:r>
+              <a:rPr>
+                <a:solidFill>
+                  <a:srgbClr val="003B4F"/>
+                </a:solidFill>
+                <a:latin typeface="Courier"/>
+              </a:rPr>
+              <a:t> </a:t>
+            </a:r>
+            <a:r>
+              <a:rPr>
+                <a:solidFill>
+                  <a:srgbClr val="4758AB"/>
+                </a:solidFill>
+                <a:latin typeface="Courier"/>
+              </a:rPr>
+              <a:t>position_jitter</a:t>
+            </a:r>
+            <a:r>
+              <a:rPr>
+                <a:solidFill>
+                  <a:srgbClr val="003B4F"/>
+                </a:solidFill>
+                <a:latin typeface="Courier"/>
+              </a:rPr>
+              <a:t>(</a:t>
+            </a:r>
+            <a:r>
+              <a:rPr>
+                <a:solidFill>
+                  <a:srgbClr val="657422"/>
+                </a:solidFill>
+                <a:latin typeface="Courier"/>
+              </a:rPr>
+              <a:t>width =</a:t>
+            </a:r>
+            <a:r>
+              <a:rPr>
+                <a:solidFill>
+                  <a:srgbClr val="003B4F"/>
+                </a:solidFill>
+                <a:latin typeface="Courier"/>
+              </a:rPr>
+              <a:t> </a:t>
+            </a:r>
+            <a:r>
+              <a:rPr>
+                <a:solidFill>
+                  <a:srgbClr val="AD0000"/>
+                </a:solidFill>
+                <a:latin typeface="Courier"/>
+              </a:rPr>
+              <a:t>0.15</a:t>
+            </a:r>
+            <a:r>
+              <a:rPr>
+                <a:solidFill>
+                  <a:srgbClr val="003B4F"/>
+                </a:solidFill>
+                <a:latin typeface="Courier"/>
+              </a:rPr>
+              <a:t>, </a:t>
+            </a:r>
+            <a:r>
+              <a:rPr>
+                <a:solidFill>
+                  <a:srgbClr val="657422"/>
+                </a:solidFill>
+                <a:latin typeface="Courier"/>
+              </a:rPr>
+              <a:t>seed =</a:t>
+            </a:r>
+            <a:r>
+              <a:rPr>
+                <a:solidFill>
+                  <a:srgbClr val="003B4F"/>
+                </a:solidFill>
+                <a:latin typeface="Courier"/>
+              </a:rPr>
+              <a:t> </a:t>
+            </a:r>
+            <a:r>
+              <a:rPr>
+                <a:solidFill>
+                  <a:srgbClr val="AD0000"/>
+                </a:solidFill>
+                <a:latin typeface="Courier"/>
+              </a:rPr>
+              <a:t>42</a:t>
+            </a:r>
+            <a:r>
+              <a:rPr>
+                <a:solidFill>
+                  <a:srgbClr val="003B4F"/>
+                </a:solidFill>
+                <a:latin typeface="Courier"/>
+              </a:rPr>
+              <a:t>), </a:t>
+            </a:r>
+            <a:r>
+              <a:rPr>
+                <a:solidFill>
+                  <a:srgbClr val="657422"/>
+                </a:solidFill>
+                <a:latin typeface="Courier"/>
+              </a:rPr>
+              <a:t>size =</a:t>
+            </a:r>
+            <a:r>
+              <a:rPr>
+                <a:solidFill>
+                  <a:srgbClr val="003B4F"/>
+                </a:solidFill>
+                <a:latin typeface="Courier"/>
+              </a:rPr>
+              <a:t> </a:t>
+            </a:r>
+            <a:r>
+              <a:rPr>
+                <a:solidFill>
+                  <a:srgbClr val="AD0000"/>
+                </a:solidFill>
+                <a:latin typeface="Courier"/>
+              </a:rPr>
+              <a:t>2.5</a:t>
+            </a:r>
+            <a:r>
+              <a:rPr>
+                <a:solidFill>
+                  <a:srgbClr val="003B4F"/>
+                </a:solidFill>
+                <a:latin typeface="Courier"/>
+              </a:rPr>
+              <a:t>) </a:t>
+            </a:r>
+            <a:r>
+              <a:rPr>
+                <a:solidFill>
+                  <a:srgbClr val="5E5E5E"/>
+                </a:solidFill>
+                <a:latin typeface="Courier"/>
+              </a:rPr>
+              <a:t>+</a:t>
+            </a:r>
+            <a:br/>
+            <a:r>
+              <a:rPr>
+                <a:solidFill>
+                  <a:srgbClr val="003B4F"/>
+                </a:solidFill>
+                <a:latin typeface="Courier"/>
+              </a:rPr>
+              <a:t>  </a:t>
+            </a:r>
+            <a:r>
+              <a:rPr>
+                <a:solidFill>
+                  <a:srgbClr val="4758AB"/>
+                </a:solidFill>
+                <a:latin typeface="Courier"/>
+              </a:rPr>
+              <a:t>stat_summary</a:t>
+            </a:r>
+            <a:r>
+              <a:rPr>
+                <a:solidFill>
+                  <a:srgbClr val="003B4F"/>
+                </a:solidFill>
+                <a:latin typeface="Courier"/>
+              </a:rPr>
+              <a:t>(</a:t>
+            </a:r>
+            <a:r>
+              <a:rPr>
+                <a:solidFill>
+                  <a:srgbClr val="657422"/>
+                </a:solidFill>
+                <a:latin typeface="Courier"/>
+              </a:rPr>
+              <a:t>fun =</a:t>
+            </a:r>
+            <a:r>
+              <a:rPr>
+                <a:solidFill>
+                  <a:srgbClr val="003B4F"/>
+                </a:solidFill>
+                <a:latin typeface="Courier"/>
+              </a:rPr>
+              <a:t> mean, </a:t>
+            </a:r>
+            <a:r>
+              <a:rPr>
+                <a:solidFill>
+                  <a:srgbClr val="657422"/>
+                </a:solidFill>
+                <a:latin typeface="Courier"/>
+              </a:rPr>
+              <a:t>geom =</a:t>
+            </a:r>
+            <a:r>
+              <a:rPr>
+                <a:solidFill>
+                  <a:srgbClr val="003B4F"/>
+                </a:solidFill>
+                <a:latin typeface="Courier"/>
+              </a:rPr>
+              <a:t> </a:t>
+            </a:r>
+            <a:r>
+              <a:rPr>
+                <a:solidFill>
+                  <a:srgbClr val="20794D"/>
+                </a:solidFill>
+                <a:latin typeface="Courier"/>
+              </a:rPr>
+              <a:t>"point"</a:t>
+            </a:r>
+            <a:r>
+              <a:rPr>
+                <a:solidFill>
+                  <a:srgbClr val="003B4F"/>
+                </a:solidFill>
+                <a:latin typeface="Courier"/>
+              </a:rPr>
+              <a:t>, </a:t>
+            </a:r>
+            <a:r>
+              <a:rPr>
+                <a:solidFill>
+                  <a:srgbClr val="657422"/>
+                </a:solidFill>
+                <a:latin typeface="Courier"/>
+              </a:rPr>
+              <a:t>size =</a:t>
+            </a:r>
+            <a:r>
+              <a:rPr>
+                <a:solidFill>
+                  <a:srgbClr val="003B4F"/>
+                </a:solidFill>
+                <a:latin typeface="Courier"/>
+              </a:rPr>
+              <a:t> </a:t>
+            </a:r>
+            <a:r>
+              <a:rPr>
+                <a:solidFill>
+                  <a:srgbClr val="AD0000"/>
+                </a:solidFill>
+                <a:latin typeface="Courier"/>
+              </a:rPr>
+              <a:t>4</a:t>
+            </a:r>
+            <a:r>
+              <a:rPr>
+                <a:solidFill>
+                  <a:srgbClr val="003B4F"/>
+                </a:solidFill>
+                <a:latin typeface="Courier"/>
+              </a:rPr>
+              <a:t>, </a:t>
+            </a:r>
+            <a:r>
+              <a:rPr>
+                <a:solidFill>
+                  <a:srgbClr val="657422"/>
+                </a:solidFill>
+                <a:latin typeface="Courier"/>
+              </a:rPr>
+              <a:t>color =</a:t>
+            </a:r>
+            <a:r>
+              <a:rPr>
+                <a:solidFill>
+                  <a:srgbClr val="003B4F"/>
+                </a:solidFill>
+                <a:latin typeface="Courier"/>
+              </a:rPr>
+              <a:t> </a:t>
+            </a:r>
+            <a:r>
+              <a:rPr>
+                <a:solidFill>
+                  <a:srgbClr val="20794D"/>
+                </a:solidFill>
+                <a:latin typeface="Courier"/>
+              </a:rPr>
+              <a:t>"black"</a:t>
+            </a:r>
+            <a:r>
+              <a:rPr>
+                <a:solidFill>
+                  <a:srgbClr val="003B4F"/>
+                </a:solidFill>
+                <a:latin typeface="Courier"/>
+              </a:rPr>
+              <a:t>) </a:t>
+            </a:r>
+            <a:r>
+              <a:rPr>
+                <a:solidFill>
+                  <a:srgbClr val="5E5E5E"/>
+                </a:solidFill>
+                <a:latin typeface="Courier"/>
+              </a:rPr>
+              <a:t>+</a:t>
+            </a:r>
+            <a:br/>
+            <a:r>
+              <a:rPr>
+                <a:solidFill>
+                  <a:srgbClr val="003B4F"/>
+                </a:solidFill>
+                <a:latin typeface="Courier"/>
+              </a:rPr>
+              <a:t>  </a:t>
+            </a:r>
+            <a:r>
+              <a:rPr>
+                <a:solidFill>
+                  <a:srgbClr val="4758AB"/>
+                </a:solidFill>
+                <a:latin typeface="Courier"/>
+              </a:rPr>
+              <a:t>scale_color_manual</a:t>
+            </a:r>
+            <a:r>
+              <a:rPr>
+                <a:solidFill>
+                  <a:srgbClr val="003B4F"/>
+                </a:solidFill>
+                <a:latin typeface="Courier"/>
+              </a:rPr>
+              <a:t>(</a:t>
+            </a:r>
+            <a:br/>
+            <a:r>
+              <a:rPr>
+                <a:solidFill>
+                  <a:srgbClr val="003B4F"/>
+                </a:solidFill>
+                <a:latin typeface="Courier"/>
+              </a:rPr>
+              <a:t>    </a:t>
+            </a:r>
+            <a:r>
+              <a:rPr>
+                <a:solidFill>
+                  <a:srgbClr val="657422"/>
+                </a:solidFill>
+                <a:latin typeface="Courier"/>
+              </a:rPr>
+              <a:t>name   =</a:t>
+            </a:r>
+            <a:r>
+              <a:rPr>
+                <a:solidFill>
+                  <a:srgbClr val="003B4F"/>
+                </a:solidFill>
+                <a:latin typeface="Courier"/>
+              </a:rPr>
+              <a:t> </a:t>
+            </a:r>
+            <a:r>
+              <a:rPr>
+                <a:solidFill>
+                  <a:srgbClr val="20794D"/>
+                </a:solidFill>
+                <a:latin typeface="Courier"/>
+              </a:rPr>
+              <a:t>"Side of tree"</a:t>
+            </a:r>
+            <a:r>
+              <a:rPr>
+                <a:solidFill>
+                  <a:srgbClr val="003B4F"/>
+                </a:solidFill>
+                <a:latin typeface="Courier"/>
+              </a:rPr>
+              <a:t>,</a:t>
+            </a:r>
+            <a:br/>
+            <a:r>
+              <a:rPr>
+                <a:solidFill>
+                  <a:srgbClr val="003B4F"/>
+                </a:solidFill>
+                <a:latin typeface="Courier"/>
+              </a:rPr>
+              <a:t>    </a:t>
+            </a:r>
+            <a:r>
+              <a:rPr>
+                <a:solidFill>
+                  <a:srgbClr val="657422"/>
+                </a:solidFill>
+                <a:latin typeface="Courier"/>
+              </a:rPr>
+              <a:t>labels =</a:t>
+            </a:r>
+            <a:r>
+              <a:rPr>
+                <a:solidFill>
+                  <a:srgbClr val="003B4F"/>
+                </a:solidFill>
+                <a:latin typeface="Courier"/>
+              </a:rPr>
+              <a:t> </a:t>
+            </a:r>
+            <a:r>
+              <a:rPr>
+                <a:solidFill>
+                  <a:srgbClr val="4758AB"/>
+                </a:solidFill>
+                <a:latin typeface="Courier"/>
+              </a:rPr>
+              <a:t>c</a:t>
+            </a:r>
+            <a:r>
+              <a:rPr>
+                <a:solidFill>
+                  <a:srgbClr val="003B4F"/>
+                </a:solidFill>
+                <a:latin typeface="Courier"/>
+              </a:rPr>
+              <a:t>(</a:t>
+            </a:r>
+            <a:r>
+              <a:rPr>
+                <a:solidFill>
+                  <a:srgbClr val="657422"/>
+                </a:solidFill>
+                <a:latin typeface="Courier"/>
+              </a:rPr>
+              <a:t>n =</a:t>
+            </a:r>
+            <a:r>
+              <a:rPr>
+                <a:solidFill>
+                  <a:srgbClr val="003B4F"/>
+                </a:solidFill>
+                <a:latin typeface="Courier"/>
+              </a:rPr>
+              <a:t> </a:t>
+            </a:r>
+            <a:r>
+              <a:rPr>
+                <a:solidFill>
+                  <a:srgbClr val="20794D"/>
+                </a:solidFill>
+                <a:latin typeface="Courier"/>
+              </a:rPr>
+              <a:t>"Lee (sheltered)"</a:t>
+            </a:r>
+            <a:r>
+              <a:rPr>
+                <a:solidFill>
+                  <a:srgbClr val="003B4F"/>
+                </a:solidFill>
+                <a:latin typeface="Courier"/>
+              </a:rPr>
+              <a:t>, </a:t>
+            </a:r>
+            <a:r>
+              <a:rPr>
+                <a:solidFill>
+                  <a:srgbClr val="657422"/>
+                </a:solidFill>
+                <a:latin typeface="Courier"/>
+              </a:rPr>
+              <a:t>s =</a:t>
+            </a:r>
+            <a:r>
+              <a:rPr>
+                <a:solidFill>
+                  <a:srgbClr val="003B4F"/>
+                </a:solidFill>
+                <a:latin typeface="Courier"/>
+              </a:rPr>
+              <a:t> </a:t>
+            </a:r>
+            <a:r>
+              <a:rPr>
+                <a:solidFill>
+                  <a:srgbClr val="20794D"/>
+                </a:solidFill>
+                <a:latin typeface="Courier"/>
+              </a:rPr>
+              <a:t>"Windward"</a:t>
+            </a:r>
+            <a:r>
+              <a:rPr>
+                <a:solidFill>
+                  <a:srgbClr val="003B4F"/>
+                </a:solidFill>
+                <a:latin typeface="Courier"/>
+              </a:rPr>
+              <a:t>),</a:t>
+            </a:r>
+            <a:br/>
+            <a:r>
+              <a:rPr>
+                <a:solidFill>
+                  <a:srgbClr val="003B4F"/>
+                </a:solidFill>
+                <a:latin typeface="Courier"/>
+              </a:rPr>
+              <a:t>    </a:t>
+            </a:r>
+            <a:r>
+              <a:rPr>
+                <a:solidFill>
+                  <a:srgbClr val="657422"/>
+                </a:solidFill>
+                <a:latin typeface="Courier"/>
+              </a:rPr>
+              <a:t>values =</a:t>
+            </a:r>
+            <a:r>
+              <a:rPr>
+                <a:solidFill>
+                  <a:srgbClr val="003B4F"/>
+                </a:solidFill>
+                <a:latin typeface="Courier"/>
+              </a:rPr>
+              <a:t> </a:t>
+            </a:r>
+            <a:r>
+              <a:rPr>
+                <a:solidFill>
+                  <a:srgbClr val="4758AB"/>
+                </a:solidFill>
+                <a:latin typeface="Courier"/>
+              </a:rPr>
+              <a:t>c</a:t>
+            </a:r>
+            <a:r>
+              <a:rPr>
+                <a:solidFill>
+                  <a:srgbClr val="003B4F"/>
+                </a:solidFill>
+                <a:latin typeface="Courier"/>
+              </a:rPr>
+              <a:t>(</a:t>
+            </a:r>
+            <a:r>
+              <a:rPr>
+                <a:solidFill>
+                  <a:srgbClr val="657422"/>
+                </a:solidFill>
+                <a:latin typeface="Courier"/>
+              </a:rPr>
+              <a:t>n =</a:t>
+            </a:r>
+            <a:r>
+              <a:rPr>
+                <a:solidFill>
+                  <a:srgbClr val="003B4F"/>
+                </a:solidFill>
+                <a:latin typeface="Courier"/>
+              </a:rPr>
+              <a:t> </a:t>
+            </a:r>
+            <a:r>
+              <a:rPr>
+                <a:solidFill>
+                  <a:srgbClr val="20794D"/>
+                </a:solidFill>
+                <a:latin typeface="Courier"/>
+              </a:rPr>
+              <a:t>"#2c7fb8"</a:t>
+            </a:r>
+            <a:r>
+              <a:rPr>
+                <a:solidFill>
+                  <a:srgbClr val="003B4F"/>
+                </a:solidFill>
+                <a:latin typeface="Courier"/>
+              </a:rPr>
+              <a:t>, </a:t>
+            </a:r>
+            <a:r>
+              <a:rPr>
+                <a:solidFill>
+                  <a:srgbClr val="657422"/>
+                </a:solidFill>
+                <a:latin typeface="Courier"/>
+              </a:rPr>
+              <a:t>s =</a:t>
+            </a:r>
+            <a:r>
+              <a:rPr>
+                <a:solidFill>
+                  <a:srgbClr val="003B4F"/>
+                </a:solidFill>
+                <a:latin typeface="Courier"/>
+              </a:rPr>
+              <a:t> </a:t>
+            </a:r>
+            <a:r>
+              <a:rPr>
+                <a:solidFill>
+                  <a:srgbClr val="20794D"/>
+                </a:solidFill>
+                <a:latin typeface="Courier"/>
+              </a:rPr>
+              <a:t>"#d95f0e"</a:t>
+            </a:r>
+            <a:r>
+              <a:rPr>
+                <a:solidFill>
+                  <a:srgbClr val="003B4F"/>
+                </a:solidFill>
+                <a:latin typeface="Courier"/>
+              </a:rPr>
+              <a:t>)</a:t>
+            </a:r>
+            <a:br/>
+            <a:r>
+              <a:rPr>
+                <a:solidFill>
+                  <a:srgbClr val="003B4F"/>
+                </a:solidFill>
+                <a:latin typeface="Courier"/>
+              </a:rPr>
+              <a:t>  ) </a:t>
+            </a:r>
+            <a:r>
+              <a:rPr>
+                <a:solidFill>
+                  <a:srgbClr val="5E5E5E"/>
+                </a:solidFill>
+                <a:latin typeface="Courier"/>
+              </a:rPr>
+              <a:t>+</a:t>
+            </a:r>
+            <a:br/>
+            <a:r>
+              <a:rPr>
+                <a:solidFill>
+                  <a:srgbClr val="003B4F"/>
+                </a:solidFill>
+                <a:latin typeface="Courier"/>
+              </a:rPr>
+              <a:t>  </a:t>
+            </a:r>
+            <a:r>
+              <a:rPr>
+                <a:solidFill>
+                  <a:srgbClr val="4758AB"/>
+                </a:solidFill>
+                <a:latin typeface="Courier"/>
+              </a:rPr>
+              <a:t>labs</a:t>
+            </a:r>
+            <a:r>
+              <a:rPr>
+                <a:solidFill>
+                  <a:srgbClr val="003B4F"/>
+                </a:solidFill>
+                <a:latin typeface="Courier"/>
+              </a:rPr>
+              <a:t>(</a:t>
+            </a:r>
+            <a:r>
+              <a:rPr>
+                <a:solidFill>
+                  <a:srgbClr val="657422"/>
+                </a:solidFill>
+                <a:latin typeface="Courier"/>
+              </a:rPr>
+              <a:t>x =</a:t>
+            </a:r>
+            <a:r>
+              <a:rPr>
+                <a:solidFill>
+                  <a:srgbClr val="003B4F"/>
+                </a:solidFill>
+                <a:latin typeface="Courier"/>
+              </a:rPr>
+              <a:t> </a:t>
+            </a:r>
+            <a:r>
+              <a:rPr>
+                <a:solidFill>
+                  <a:srgbClr val="20794D"/>
+                </a:solidFill>
+                <a:latin typeface="Courier"/>
+              </a:rPr>
+              <a:t>"Side of tree"</a:t>
+            </a:r>
+            <a:r>
+              <a:rPr>
+                <a:solidFill>
+                  <a:srgbClr val="003B4F"/>
+                </a:solidFill>
+                <a:latin typeface="Courier"/>
+              </a:rPr>
+              <a:t>, </a:t>
+            </a:r>
+            <a:r>
+              <a:rPr>
+                <a:solidFill>
+                  <a:srgbClr val="657422"/>
+                </a:solidFill>
+                <a:latin typeface="Courier"/>
+              </a:rPr>
+              <a:t>y =</a:t>
+            </a:r>
+            <a:r>
+              <a:rPr>
+                <a:solidFill>
+                  <a:srgbClr val="003B4F"/>
+                </a:solidFill>
+                <a:latin typeface="Courier"/>
+              </a:rPr>
+              <a:t> </a:t>
+            </a:r>
+            <a:r>
+              <a:rPr>
+                <a:solidFill>
+                  <a:srgbClr val="20794D"/>
+                </a:solidFill>
+                <a:latin typeface="Courier"/>
+              </a:rPr>
+              <a:t>"Needle length (mm)"</a:t>
+            </a:r>
+            <a:r>
+              <a:rPr>
+                <a:solidFill>
+                  <a:srgbClr val="003B4F"/>
+                </a:solidFill>
+                <a:latin typeface="Courier"/>
+              </a:rPr>
+              <a:t>) </a:t>
+            </a:r>
+            <a:r>
+              <a:rPr>
+                <a:solidFill>
+                  <a:srgbClr val="5E5E5E"/>
+                </a:solidFill>
+                <a:latin typeface="Courier"/>
+              </a:rPr>
+              <a:t>+</a:t>
+            </a:r>
+            <a:br/>
+            <a:r>
+              <a:rPr>
+                <a:solidFill>
+                  <a:srgbClr val="003B4F"/>
+                </a:solidFill>
+                <a:latin typeface="Courier"/>
+              </a:rPr>
+              <a:t>  </a:t>
+            </a:r>
+            <a:r>
+              <a:rPr>
+                <a:solidFill>
+                  <a:srgbClr val="4758AB"/>
+                </a:solidFill>
+                <a:latin typeface="Courier"/>
+              </a:rPr>
+              <a:t>theme_minimal</a:t>
+            </a:r>
+            <a:r>
+              <a:rPr>
+                <a:solidFill>
+                  <a:srgbClr val="003B4F"/>
+                </a:solidFill>
+                <a:latin typeface="Courier"/>
+              </a:rPr>
+              <a:t>()</a:t>
+            </a:r>
+          </a:p>
+          <a:p>
+            <a:pPr lvl="0" indent="0" marL="0">
+              <a:buNone/>
+            </a:pPr>
+            <a:r>
+              <a:rPr/>
+              <a:t>✏️ </a:t>
+            </a:r>
+            <a:r>
+              <a:rPr b="1"/>
+              <a:t>Your turn:</a:t>
+            </a:r>
+            <a:r>
+              <a:rPr/>
+              <a:t> Pick two different hex colors of your own choosing and substitute them into </a:t>
+            </a:r>
+            <a:r>
+              <a:rPr>
+                <a:latin typeface="Courier"/>
+              </a:rPr>
+              <a:t>values =</a:t>
+            </a:r>
+            <a:r>
+              <a:rPr/>
+              <a:t>. Re-run and confirm the legend and points update.</a:t>
+            </a:r>
+          </a:p>
+          <a:p>
+            <a:pPr lvl="0" indent="0">
+              <a:buNone/>
+            </a:pPr>
+            <a:r>
+              <a:rPr>
+                <a:solidFill>
+                  <a:srgbClr val="5E5E5E"/>
+                </a:solidFill>
+                <a:latin typeface="Courier"/>
+              </a:rPr>
+              <a:t># Write your code here:</a:t>
+            </a:r>
+          </a:p>
+          <a:p>
+            <a:pPr lvl="0" indent="0" marL="0">
+              <a:buNone/>
+            </a:pPr>
+            <a:r>
+              <a:rPr/>
+              <a:t>✏️ </a:t>
+            </a:r>
+            <a:r>
+              <a:rPr b="1"/>
+              <a:t>Your turn:</a:t>
+            </a:r>
+            <a:r>
+              <a:rPr/>
+              <a:t> </a:t>
+            </a:r>
+            <a:r>
+              <a:rPr>
+                <a:latin typeface="Courier"/>
+              </a:rPr>
+              <a:t>pine_df$n_s</a:t>
+            </a:r>
+            <a:r>
+              <a:rPr/>
+              <a:t> only has two levels (</a:t>
+            </a:r>
+            <a:r>
+              <a:rPr>
+                <a:latin typeface="Courier"/>
+              </a:rPr>
+              <a:t>n</a:t>
+            </a:r>
+            <a:r>
+              <a:rPr/>
+              <a:t>, </a:t>
+            </a:r>
+            <a:r>
+              <a:rPr>
+                <a:latin typeface="Courier"/>
+              </a:rPr>
+              <a:t>s</a:t>
+            </a:r>
+            <a:r>
+              <a:rPr/>
+              <a:t>). What do you think happens if </a:t>
+            </a:r>
+            <a:r>
+              <a:rPr>
+                <a:latin typeface="Courier"/>
+              </a:rPr>
+              <a:t>values =</a:t>
+            </a:r>
+            <a:r>
+              <a:rPr/>
+              <a:t> is missing an entry for one of them? Try removing the </a:t>
+            </a:r>
+            <a:r>
+              <a:rPr>
+                <a:latin typeface="Courier"/>
+              </a:rPr>
+              <a:t>s = "#d95f0e"</a:t>
+            </a:r>
+            <a:r>
+              <a:rPr/>
+              <a:t> entry and see what R does.</a:t>
+            </a:r>
+          </a:p>
+          <a:p>
+            <a:pPr lvl="0" indent="0">
+              <a:buNone/>
+            </a:pPr>
+            <a:r>
+              <a:rPr>
+                <a:latin typeface="Courier"/>
+              </a:rPr>
+              <a:t>________________________________________________________</a:t>
+            </a:r>
+          </a:p>
+          <a:p>
+            <a:pPr lvl="0" indent="0" marL="0">
+              <a:buNone/>
+            </a:pPr>
+            <a:r>
+              <a:rPr b="1"/>
+              <a:t>▶ Run this</a:t>
+            </a:r>
+            <a:r>
+              <a:rPr/>
+              <a:t> — the </a:t>
+            </a:r>
+            <a:r>
+              <a:rPr>
+                <a:latin typeface="Courier"/>
+              </a:rPr>
+              <a:t>fill</a:t>
+            </a:r>
+            <a:r>
+              <a:rPr/>
+              <a:t> equivalent, on a boxplot:</a:t>
+            </a:r>
+          </a:p>
+          <a:p>
+            <a:pPr lvl="0" indent="0">
+              <a:buNone/>
+            </a:pPr>
+            <a:r>
+              <a:rPr>
+                <a:solidFill>
+                  <a:srgbClr val="4758AB"/>
+                </a:solidFill>
+                <a:latin typeface="Courier"/>
+              </a:rPr>
+              <a:t>ggplot</a:t>
+            </a:r>
+            <a:r>
+              <a:rPr>
+                <a:solidFill>
+                  <a:srgbClr val="003B4F"/>
+                </a:solidFill>
+                <a:latin typeface="Courier"/>
+              </a:rPr>
+              <a:t>(pine_df, </a:t>
+            </a:r>
+            <a:r>
+              <a:rPr>
+                <a:solidFill>
+                  <a:srgbClr val="4758AB"/>
+                </a:solidFill>
+                <a:latin typeface="Courier"/>
+              </a:rPr>
+              <a:t>aes</a:t>
+            </a:r>
+            <a:r>
+              <a:rPr>
+                <a:solidFill>
+                  <a:srgbClr val="003B4F"/>
+                </a:solidFill>
+                <a:latin typeface="Courier"/>
+              </a:rPr>
+              <a:t>(</a:t>
+            </a:r>
+            <a:r>
+              <a:rPr>
+                <a:solidFill>
+                  <a:srgbClr val="657422"/>
+                </a:solidFill>
+                <a:latin typeface="Courier"/>
+              </a:rPr>
+              <a:t>x =</a:t>
+            </a:r>
+            <a:r>
+              <a:rPr>
+                <a:solidFill>
+                  <a:srgbClr val="003B4F"/>
+                </a:solidFill>
+                <a:latin typeface="Courier"/>
+              </a:rPr>
+              <a:t> n_s, </a:t>
+            </a:r>
+            <a:r>
+              <a:rPr>
+                <a:solidFill>
+                  <a:srgbClr val="657422"/>
+                </a:solidFill>
+                <a:latin typeface="Courier"/>
+              </a:rPr>
+              <a:t>y =</a:t>
+            </a:r>
+            <a:r>
+              <a:rPr>
+                <a:solidFill>
+                  <a:srgbClr val="003B4F"/>
+                </a:solidFill>
+                <a:latin typeface="Courier"/>
+              </a:rPr>
+              <a:t> length_mm, </a:t>
+            </a:r>
+            <a:r>
+              <a:rPr>
+                <a:solidFill>
+                  <a:srgbClr val="657422"/>
+                </a:solidFill>
+                <a:latin typeface="Courier"/>
+              </a:rPr>
+              <a:t>fill =</a:t>
+            </a:r>
+            <a:r>
+              <a:rPr>
+                <a:solidFill>
+                  <a:srgbClr val="003B4F"/>
+                </a:solidFill>
+                <a:latin typeface="Courier"/>
+              </a:rPr>
+              <a:t> n_s)) </a:t>
+            </a:r>
+            <a:r>
+              <a:rPr>
+                <a:solidFill>
+                  <a:srgbClr val="5E5E5E"/>
+                </a:solidFill>
+                <a:latin typeface="Courier"/>
+              </a:rPr>
+              <a:t>+</a:t>
+            </a:r>
+            <a:br/>
+            <a:r>
+              <a:rPr>
+                <a:solidFill>
+                  <a:srgbClr val="003B4F"/>
+                </a:solidFill>
+                <a:latin typeface="Courier"/>
+              </a:rPr>
+              <a:t>  </a:t>
+            </a:r>
+            <a:r>
+              <a:rPr>
+                <a:solidFill>
+                  <a:srgbClr val="4758AB"/>
+                </a:solidFill>
+                <a:latin typeface="Courier"/>
+              </a:rPr>
+              <a:t>geom_boxplot</a:t>
+            </a:r>
+            <a:r>
+              <a:rPr>
+                <a:solidFill>
+                  <a:srgbClr val="003B4F"/>
+                </a:solidFill>
+                <a:latin typeface="Courier"/>
+              </a:rPr>
+              <a:t>(</a:t>
+            </a:r>
+            <a:r>
+              <a:rPr>
+                <a:solidFill>
+                  <a:srgbClr val="657422"/>
+                </a:solidFill>
+                <a:latin typeface="Courier"/>
+              </a:rPr>
+              <a:t>alpha =</a:t>
+            </a:r>
+            <a:r>
+              <a:rPr>
+                <a:solidFill>
+                  <a:srgbClr val="003B4F"/>
+                </a:solidFill>
+                <a:latin typeface="Courier"/>
+              </a:rPr>
+              <a:t> </a:t>
+            </a:r>
+            <a:r>
+              <a:rPr>
+                <a:solidFill>
+                  <a:srgbClr val="AD0000"/>
+                </a:solidFill>
+                <a:latin typeface="Courier"/>
+              </a:rPr>
+              <a:t>0.7</a:t>
+            </a:r>
+            <a:r>
+              <a:rPr>
+                <a:solidFill>
+                  <a:srgbClr val="003B4F"/>
+                </a:solidFill>
+                <a:latin typeface="Courier"/>
+              </a:rPr>
+              <a:t>, </a:t>
+            </a:r>
+            <a:r>
+              <a:rPr>
+                <a:solidFill>
+                  <a:srgbClr val="657422"/>
+                </a:solidFill>
+                <a:latin typeface="Courier"/>
+              </a:rPr>
+              <a:t>outlier.shape =</a:t>
+            </a:r>
+            <a:r>
+              <a:rPr>
+                <a:solidFill>
+                  <a:srgbClr val="003B4F"/>
+                </a:solidFill>
+                <a:latin typeface="Courier"/>
+              </a:rPr>
+              <a:t> </a:t>
+            </a:r>
+            <a:r>
+              <a:rPr>
+                <a:solidFill>
+                  <a:srgbClr val="8F5902"/>
+                </a:solidFill>
+                <a:latin typeface="Courier"/>
+              </a:rPr>
+              <a:t>NA</a:t>
+            </a:r>
+            <a:r>
+              <a:rPr>
+                <a:solidFill>
+                  <a:srgbClr val="003B4F"/>
+                </a:solidFill>
+                <a:latin typeface="Courier"/>
+              </a:rPr>
+              <a:t>) </a:t>
+            </a:r>
+            <a:r>
+              <a:rPr>
+                <a:solidFill>
+                  <a:srgbClr val="5E5E5E"/>
+                </a:solidFill>
+                <a:latin typeface="Courier"/>
+              </a:rPr>
+              <a:t>+</a:t>
+            </a:r>
+            <a:br/>
+            <a:r>
+              <a:rPr>
+                <a:solidFill>
+                  <a:srgbClr val="003B4F"/>
+                </a:solidFill>
+                <a:latin typeface="Courier"/>
+              </a:rPr>
+              <a:t>  </a:t>
+            </a:r>
+            <a:r>
+              <a:rPr>
+                <a:solidFill>
+                  <a:srgbClr val="4758AB"/>
+                </a:solidFill>
+                <a:latin typeface="Courier"/>
+              </a:rPr>
+              <a:t>scale_fill_manual</a:t>
+            </a:r>
+            <a:r>
+              <a:rPr>
+                <a:solidFill>
+                  <a:srgbClr val="003B4F"/>
+                </a:solidFill>
+                <a:latin typeface="Courier"/>
+              </a:rPr>
+              <a:t>(</a:t>
+            </a:r>
+            <a:br/>
+            <a:r>
+              <a:rPr>
+                <a:solidFill>
+                  <a:srgbClr val="003B4F"/>
+                </a:solidFill>
+                <a:latin typeface="Courier"/>
+              </a:rPr>
+              <a:t>    </a:t>
+            </a:r>
+            <a:r>
+              <a:rPr>
+                <a:solidFill>
+                  <a:srgbClr val="657422"/>
+                </a:solidFill>
+                <a:latin typeface="Courier"/>
+              </a:rPr>
+              <a:t>name   =</a:t>
+            </a:r>
+            <a:r>
+              <a:rPr>
+                <a:solidFill>
+                  <a:srgbClr val="003B4F"/>
+                </a:solidFill>
+                <a:latin typeface="Courier"/>
+              </a:rPr>
+              <a:t> </a:t>
+            </a:r>
+            <a:r>
+              <a:rPr>
+                <a:solidFill>
+                  <a:srgbClr val="20794D"/>
+                </a:solidFill>
+                <a:latin typeface="Courier"/>
+              </a:rPr>
+              <a:t>"Side of tree"</a:t>
+            </a:r>
+            <a:r>
+              <a:rPr>
+                <a:solidFill>
+                  <a:srgbClr val="003B4F"/>
+                </a:solidFill>
+                <a:latin typeface="Courier"/>
+              </a:rPr>
+              <a:t>,</a:t>
+            </a:r>
+            <a:br/>
+            <a:r>
+              <a:rPr>
+                <a:solidFill>
+                  <a:srgbClr val="003B4F"/>
+                </a:solidFill>
+                <a:latin typeface="Courier"/>
+              </a:rPr>
+              <a:t>    </a:t>
+            </a:r>
+            <a:r>
+              <a:rPr>
+                <a:solidFill>
+                  <a:srgbClr val="657422"/>
+                </a:solidFill>
+                <a:latin typeface="Courier"/>
+              </a:rPr>
+              <a:t>labels =</a:t>
+            </a:r>
+            <a:r>
+              <a:rPr>
+                <a:solidFill>
+                  <a:srgbClr val="003B4F"/>
+                </a:solidFill>
+                <a:latin typeface="Courier"/>
+              </a:rPr>
+              <a:t> </a:t>
+            </a:r>
+            <a:r>
+              <a:rPr>
+                <a:solidFill>
+                  <a:srgbClr val="4758AB"/>
+                </a:solidFill>
+                <a:latin typeface="Courier"/>
+              </a:rPr>
+              <a:t>c</a:t>
+            </a:r>
+            <a:r>
+              <a:rPr>
+                <a:solidFill>
+                  <a:srgbClr val="003B4F"/>
+                </a:solidFill>
+                <a:latin typeface="Courier"/>
+              </a:rPr>
+              <a:t>(</a:t>
+            </a:r>
+            <a:r>
+              <a:rPr>
+                <a:solidFill>
+                  <a:srgbClr val="657422"/>
+                </a:solidFill>
+                <a:latin typeface="Courier"/>
+              </a:rPr>
+              <a:t>n =</a:t>
+            </a:r>
+            <a:r>
+              <a:rPr>
+                <a:solidFill>
+                  <a:srgbClr val="003B4F"/>
+                </a:solidFill>
+                <a:latin typeface="Courier"/>
+              </a:rPr>
+              <a:t> </a:t>
+            </a:r>
+            <a:r>
+              <a:rPr>
+                <a:solidFill>
+                  <a:srgbClr val="20794D"/>
+                </a:solidFill>
+                <a:latin typeface="Courier"/>
+              </a:rPr>
+              <a:t>"Lee (sheltered)"</a:t>
+            </a:r>
+            <a:r>
+              <a:rPr>
+                <a:solidFill>
+                  <a:srgbClr val="003B4F"/>
+                </a:solidFill>
+                <a:latin typeface="Courier"/>
+              </a:rPr>
+              <a:t>, </a:t>
+            </a:r>
+            <a:r>
+              <a:rPr>
+                <a:solidFill>
+                  <a:srgbClr val="657422"/>
+                </a:solidFill>
+                <a:latin typeface="Courier"/>
+              </a:rPr>
+              <a:t>s =</a:t>
+            </a:r>
+            <a:r>
+              <a:rPr>
+                <a:solidFill>
+                  <a:srgbClr val="003B4F"/>
+                </a:solidFill>
+                <a:latin typeface="Courier"/>
+              </a:rPr>
+              <a:t> </a:t>
+            </a:r>
+            <a:r>
+              <a:rPr>
+                <a:solidFill>
+                  <a:srgbClr val="20794D"/>
+                </a:solidFill>
+                <a:latin typeface="Courier"/>
+              </a:rPr>
+              <a:t>"Windward"</a:t>
+            </a:r>
+            <a:r>
+              <a:rPr>
+                <a:solidFill>
+                  <a:srgbClr val="003B4F"/>
+                </a:solidFill>
+                <a:latin typeface="Courier"/>
+              </a:rPr>
+              <a:t>),</a:t>
+            </a:r>
+            <a:br/>
+            <a:r>
+              <a:rPr>
+                <a:solidFill>
+                  <a:srgbClr val="003B4F"/>
+                </a:solidFill>
+                <a:latin typeface="Courier"/>
+              </a:rPr>
+              <a:t>    </a:t>
+            </a:r>
+            <a:r>
+              <a:rPr>
+                <a:solidFill>
+                  <a:srgbClr val="657422"/>
+                </a:solidFill>
+                <a:latin typeface="Courier"/>
+              </a:rPr>
+              <a:t>values =</a:t>
+            </a:r>
+            <a:r>
+              <a:rPr>
+                <a:solidFill>
+                  <a:srgbClr val="003B4F"/>
+                </a:solidFill>
+                <a:latin typeface="Courier"/>
+              </a:rPr>
+              <a:t> </a:t>
+            </a:r>
+            <a:r>
+              <a:rPr>
+                <a:solidFill>
+                  <a:srgbClr val="4758AB"/>
+                </a:solidFill>
+                <a:latin typeface="Courier"/>
+              </a:rPr>
+              <a:t>c</a:t>
+            </a:r>
+            <a:r>
+              <a:rPr>
+                <a:solidFill>
+                  <a:srgbClr val="003B4F"/>
+                </a:solidFill>
+                <a:latin typeface="Courier"/>
+              </a:rPr>
+              <a:t>(</a:t>
+            </a:r>
+            <a:r>
+              <a:rPr>
+                <a:solidFill>
+                  <a:srgbClr val="657422"/>
+                </a:solidFill>
+                <a:latin typeface="Courier"/>
+              </a:rPr>
+              <a:t>n =</a:t>
+            </a:r>
+            <a:r>
+              <a:rPr>
+                <a:solidFill>
+                  <a:srgbClr val="003B4F"/>
+                </a:solidFill>
+                <a:latin typeface="Courier"/>
+              </a:rPr>
+              <a:t> </a:t>
+            </a:r>
+            <a:r>
+              <a:rPr>
+                <a:solidFill>
+                  <a:srgbClr val="20794D"/>
+                </a:solidFill>
+                <a:latin typeface="Courier"/>
+              </a:rPr>
+              <a:t>"#2c7fb8"</a:t>
+            </a:r>
+            <a:r>
+              <a:rPr>
+                <a:solidFill>
+                  <a:srgbClr val="003B4F"/>
+                </a:solidFill>
+                <a:latin typeface="Courier"/>
+              </a:rPr>
+              <a:t>, </a:t>
+            </a:r>
+            <a:r>
+              <a:rPr>
+                <a:solidFill>
+                  <a:srgbClr val="657422"/>
+                </a:solidFill>
+                <a:latin typeface="Courier"/>
+              </a:rPr>
+              <a:t>s =</a:t>
+            </a:r>
+            <a:r>
+              <a:rPr>
+                <a:solidFill>
+                  <a:srgbClr val="003B4F"/>
+                </a:solidFill>
+                <a:latin typeface="Courier"/>
+              </a:rPr>
+              <a:t> </a:t>
+            </a:r>
+            <a:r>
+              <a:rPr>
+                <a:solidFill>
+                  <a:srgbClr val="20794D"/>
+                </a:solidFill>
+                <a:latin typeface="Courier"/>
+              </a:rPr>
+              <a:t>"#d95f0e"</a:t>
+            </a:r>
+            <a:r>
+              <a:rPr>
+                <a:solidFill>
+                  <a:srgbClr val="003B4F"/>
+                </a:solidFill>
+                <a:latin typeface="Courier"/>
+              </a:rPr>
+              <a:t>)</a:t>
+            </a:r>
+            <a:br/>
+            <a:r>
+              <a:rPr>
+                <a:solidFill>
+                  <a:srgbClr val="003B4F"/>
+                </a:solidFill>
+                <a:latin typeface="Courier"/>
+              </a:rPr>
+              <a:t>  ) </a:t>
+            </a:r>
+            <a:r>
+              <a:rPr>
+                <a:solidFill>
+                  <a:srgbClr val="5E5E5E"/>
+                </a:solidFill>
+                <a:latin typeface="Courier"/>
+              </a:rPr>
+              <a:t>+</a:t>
+            </a:r>
+            <a:br/>
+            <a:r>
+              <a:rPr>
+                <a:solidFill>
+                  <a:srgbClr val="003B4F"/>
+                </a:solidFill>
+                <a:latin typeface="Courier"/>
+              </a:rPr>
+              <a:t>  </a:t>
+            </a:r>
+            <a:r>
+              <a:rPr>
+                <a:solidFill>
+                  <a:srgbClr val="4758AB"/>
+                </a:solidFill>
+                <a:latin typeface="Courier"/>
+              </a:rPr>
+              <a:t>labs</a:t>
+            </a:r>
+            <a:r>
+              <a:rPr>
+                <a:solidFill>
+                  <a:srgbClr val="003B4F"/>
+                </a:solidFill>
+                <a:latin typeface="Courier"/>
+              </a:rPr>
+              <a:t>(</a:t>
+            </a:r>
+            <a:r>
+              <a:rPr>
+                <a:solidFill>
+                  <a:srgbClr val="657422"/>
+                </a:solidFill>
+                <a:latin typeface="Courier"/>
+              </a:rPr>
+              <a:t>x =</a:t>
+            </a:r>
+            <a:r>
+              <a:rPr>
+                <a:solidFill>
+                  <a:srgbClr val="003B4F"/>
+                </a:solidFill>
+                <a:latin typeface="Courier"/>
+              </a:rPr>
+              <a:t> </a:t>
+            </a:r>
+            <a:r>
+              <a:rPr>
+                <a:solidFill>
+                  <a:srgbClr val="20794D"/>
+                </a:solidFill>
+                <a:latin typeface="Courier"/>
+              </a:rPr>
+              <a:t>"Side of tree"</a:t>
+            </a:r>
+            <a:r>
+              <a:rPr>
+                <a:solidFill>
+                  <a:srgbClr val="003B4F"/>
+                </a:solidFill>
+                <a:latin typeface="Courier"/>
+              </a:rPr>
+              <a:t>, </a:t>
+            </a:r>
+            <a:r>
+              <a:rPr>
+                <a:solidFill>
+                  <a:srgbClr val="657422"/>
+                </a:solidFill>
+                <a:latin typeface="Courier"/>
+              </a:rPr>
+              <a:t>y =</a:t>
+            </a:r>
+            <a:r>
+              <a:rPr>
+                <a:solidFill>
+                  <a:srgbClr val="003B4F"/>
+                </a:solidFill>
+                <a:latin typeface="Courier"/>
+              </a:rPr>
+              <a:t> </a:t>
+            </a:r>
+            <a:r>
+              <a:rPr>
+                <a:solidFill>
+                  <a:srgbClr val="20794D"/>
+                </a:solidFill>
+                <a:latin typeface="Courier"/>
+              </a:rPr>
+              <a:t>"Needle length (mm)"</a:t>
+            </a:r>
+            <a:r>
+              <a:rPr>
+                <a:solidFill>
+                  <a:srgbClr val="003B4F"/>
+                </a:solidFill>
+                <a:latin typeface="Courier"/>
+              </a:rPr>
+              <a:t>) </a:t>
+            </a:r>
+            <a:r>
+              <a:rPr>
+                <a:solidFill>
+                  <a:srgbClr val="5E5E5E"/>
+                </a:solidFill>
+                <a:latin typeface="Courier"/>
+              </a:rPr>
+              <a:t>+</a:t>
+            </a:r>
+            <a:br/>
+            <a:r>
+              <a:rPr>
+                <a:solidFill>
+                  <a:srgbClr val="003B4F"/>
+                </a:solidFill>
+                <a:latin typeface="Courier"/>
+              </a:rPr>
+              <a:t>  </a:t>
+            </a:r>
+            <a:r>
+              <a:rPr>
+                <a:solidFill>
+                  <a:srgbClr val="4758AB"/>
+                </a:solidFill>
+                <a:latin typeface="Courier"/>
+              </a:rPr>
+              <a:t>theme_minimal</a:t>
+            </a:r>
+            <a:r>
+              <a:rPr>
+                <a:solidFill>
+                  <a:srgbClr val="003B4F"/>
+                </a:solidFill>
+                <a:latin typeface="Courier"/>
+              </a:rPr>
+              <a:t>()</a:t>
+            </a:r>
+          </a:p>
+          <a:p>
+            <a:pPr lvl="0" indent="0" marL="0">
+              <a:buNone/>
+            </a:pPr>
+            <a:r>
+              <a:rPr/>
+              <a:t>✏️ </a:t>
+            </a:r>
+            <a:r>
+              <a:rPr b="1"/>
+              <a:t>Your turn:</a:t>
+            </a:r>
+            <a:r>
+              <a:rPr/>
+              <a:t> In one sentence, when do you reach for </a:t>
+            </a:r>
+            <a:r>
+              <a:rPr>
+                <a:latin typeface="Courier"/>
+              </a:rPr>
+              <a:t>scale_color_manual()</a:t>
+            </a:r>
+            <a:r>
+              <a:rPr/>
+              <a:t> versus </a:t>
+            </a:r>
+            <a:r>
+              <a:rPr>
+                <a:latin typeface="Courier"/>
+              </a:rPr>
+              <a:t>scale_fill_manual()</a:t>
+            </a:r>
+            <a:r>
+              <a:rPr/>
+              <a:t>? </a:t>
+            </a:r>
+            <a:r>
+              <a:rPr>
+                <a:latin typeface="Courier"/>
+              </a:rPr>
+              <a:t>________________________</a:t>
+            </a:r>
+          </a:p>
+        </p:txBody>
+      </p:sp>
+    </p:spTree>
+  </p:cSld>
+</p:sld>
+</file>
+
+<file path=ppt/slides/slide14.xml><?xml version="1.0" encoding="utf-8"?>
+<p:sld xmlns:a="http://schemas.openxmlformats.org/drawingml/2006/main" xmlns:r="http://schemas.openxmlformats.org/officeDocument/2006/relationships" xmlns:p="http://schemas.openxmlformats.org/presentationml/2006/main">
+  <p:cSld>
+    <p:spTree>
+      <p:nvGrpSpPr>
+        <p:cNvPr id="1" name=""/>
+        <p:cNvGrpSpPr/>
+        <p:nvPr/>
+      </p:nvGrpSpPr>
+      <p:grpSpPr>
+        <a:xfrm>
+          <a:off x="0" y="0"/>
+          <a:ext cx="0" cy="0"/>
+          <a:chOff x="0" y="0"/>
+          <a:chExt cx="0" cy="0"/>
+        </a:xfrm>
+      </p:grpSpPr>
+      <p:sp>
+        <p:nvSpPr>
+          <p:cNvPr id="2" name="Title 1"/>
+          <p:cNvSpPr>
+            <a:spLocks noGrp="1"/>
+          </p:cNvSpPr>
+          <p:nvPr>
+            <p:ph type="title"/>
+          </p:nvPr>
+        </p:nvSpPr>
+        <p:spPr>
+          <a:xfrm>
+            <a:off x="0" y="0"/>
+            <a:ext cx="9144000" cy="582780"/>
+          </a:xfrm>
+        </p:spPr>
+        <p:txBody>
+          <a:bodyPr/>
+          <a:lstStyle/>
+          <a:p>
+            <a:pPr lvl="0" indent="0" marL="0">
+              <a:buNone/>
+            </a:pPr>
+            <a:r>
+              <a:rPr/>
+              <a:t>Part 9 · Review and checkpoint</a:t>
+            </a:r>
+          </a:p>
+        </p:txBody>
+      </p:sp>
+      <p:sp>
+        <p:nvSpPr>
+          <p:cNvPr id="3" name="Content Placeholder 2"/>
+          <p:cNvSpPr>
+            <a:spLocks noGrp="1"/>
+          </p:cNvSpPr>
+          <p:nvPr>
+            <p:ph idx="1"/>
+          </p:nvPr>
+        </p:nvSpPr>
+        <p:spPr/>
+        <p:txBody>
+          <a:bodyPr/>
+          <a:lstStyle/>
+          <a:p>
+            <a:pPr lvl="0" indent="0" marL="0">
+              <a:buNone/>
+            </a:pPr>
+            <a:r>
+              <a:rPr/>
+              <a:t>At this point you can:</a:t>
+            </a:r>
+          </a:p>
+          <a:p>
+            <a:pPr lvl="0"/>
+            <a:r>
+              <a:rPr/>
+              <a:t>☐ Build a boxplot with raw points overlaid</a:t>
+            </a:r>
+          </a:p>
+          <a:p>
+            <a:pPr lvl="0"/>
+            <a:r>
+              <a:rPr/>
+              <a:t>☐ Write real titles, axis labels, and legend titles with </a:t>
+            </a:r>
+            <a:r>
+              <a:rPr>
+                <a:latin typeface="Courier"/>
+              </a:rPr>
+              <a:t>labs()</a:t>
+            </a:r>
+          </a:p>
+          <a:p>
+            <a:pPr lvl="0"/>
+            <a:r>
+              <a:rPr/>
+              <a:t>☐ Map a third variable using </a:t>
+            </a:r>
+            <a:r>
+              <a:rPr>
+                <a:latin typeface="Courier"/>
+              </a:rPr>
+              <a:t>color =</a:t>
+            </a:r>
+            <a:r>
+              <a:rPr/>
+              <a:t> or </a:t>
+            </a:r>
+            <a:r>
+              <a:rPr>
+                <a:latin typeface="Courier"/>
+              </a:rPr>
+              <a:t>fill =</a:t>
+            </a:r>
+            <a:r>
+              <a:rPr/>
+              <a:t> inside </a:t>
+            </a:r>
+            <a:r>
+              <a:rPr>
+                <a:latin typeface="Courier"/>
+              </a:rPr>
+              <a:t>aes()</a:t>
+            </a:r>
+          </a:p>
+          <a:p>
+            <a:pPr lvl="0"/>
+            <a:r>
+              <a:rPr/>
+              <a:t>☐ Build a histogram and a density curve, and pick a sensible </a:t>
+            </a:r>
+            <a:r>
+              <a:rPr>
+                <a:latin typeface="Courier"/>
+              </a:rPr>
+              <a:t>binwidth</a:t>
+            </a:r>
+          </a:p>
+          <a:p>
+            <a:pPr lvl="0"/>
+            <a:r>
+              <a:rPr/>
+              <a:t>☐ Plot mean ± SE directly with </a:t>
+            </a:r>
+            <a:r>
+              <a:rPr>
+                <a:latin typeface="Courier"/>
+              </a:rPr>
+              <a:t>stat_summary()</a:t>
+            </a:r>
+          </a:p>
+          <a:p>
+            <a:pPr lvl="0"/>
+            <a:r>
+              <a:rPr/>
+              <a:t>☐ Facet a plot with </a:t>
+            </a:r>
+            <a:r>
+              <a:rPr>
+                <a:latin typeface="Courier"/>
+              </a:rPr>
+              <a:t>facet_wrap()</a:t>
+            </a:r>
+            <a:r>
+              <a:rPr/>
+              <a:t> to compare every group at once</a:t>
+            </a:r>
+          </a:p>
+          <a:p>
+            <a:pPr lvl="0"/>
+            <a:r>
+              <a:rPr/>
+              <a:t>☐ Compare at least two </a:t>
+            </a:r>
+            <a:r>
+              <a:rPr>
+                <a:latin typeface="Courier"/>
+              </a:rPr>
+              <a:t>ggplot</a:t>
+            </a:r>
+            <a:r>
+              <a:rPr/>
+              <a:t> themes</a:t>
+            </a:r>
+          </a:p>
+          <a:p>
+            <a:pPr lvl="0"/>
+            <a:r>
+              <a:rPr/>
+              <a:t>☐ Save a figure at an explicit width, height, units, and dpi with </a:t>
+            </a:r>
+            <a:r>
+              <a:rPr>
+                <a:latin typeface="Courier"/>
+              </a:rPr>
+              <a:t>ggsave()</a:t>
+            </a:r>
+          </a:p>
+          <a:p>
+            <a:pPr lvl="0"/>
+            <a:r>
+              <a:rPr/>
+              <a:t>☐ </a:t>
+            </a:r>
+            <a:r>
+              <a:rPr i="1"/>
+              <a:t>(Advanced)</a:t>
+            </a:r>
+            <a:r>
+              <a:rPr/>
+              <a:t> Set exact colors and legend labels with </a:t>
+            </a:r>
+            <a:r>
+              <a:rPr>
+                <a:latin typeface="Courier"/>
+              </a:rPr>
+              <a:t>scale_color_manual()</a:t>
+            </a:r>
+            <a:r>
+              <a:rPr/>
+              <a:t> / </a:t>
+            </a:r>
+            <a:r>
+              <a:rPr>
+                <a:latin typeface="Courier"/>
+              </a:rPr>
+              <a:t>scale_fill_manual()</a:t>
+            </a:r>
+          </a:p>
+          <a:p>
+            <a:pPr lvl="0" indent="0" marL="0">
+              <a:buNone/>
+            </a:pPr>
+            <a:r>
+              <a:rPr/>
+              <a:t>✏️ </a:t>
+            </a:r>
+            <a:r>
+              <a:rPr b="1"/>
+              <a:t>Your turn — before you move on:</a:t>
+            </a:r>
+            <a:r>
+              <a:rPr/>
+              <a:t> Run your whole script top to bottom. Ran cleanly? </a:t>
+            </a:r>
+            <a:r>
+              <a:rPr>
+                <a:latin typeface="Courier"/>
+              </a:rPr>
+              <a:t>Y / N</a:t>
+            </a:r>
+            <a:r>
+              <a:rPr/>
+              <a:t> — if not, the error was: </a:t>
+            </a:r>
+            <a:r>
+              <a:rPr>
+                <a:latin typeface="Courier"/>
+              </a:rPr>
+              <a:t>________________________</a:t>
+            </a:r>
+          </a:p>
+          <a:p>
+            <a:pPr lvl="0" indent="0" marL="1270000">
+              <a:buNone/>
+            </a:pPr>
+            <a:r>
+              <a:rPr sz="2000" b="1"/>
+              <a:t>Note</a:t>
+            </a:r>
+          </a:p>
+          <a:p>
+            <a:pPr lvl="0" indent="0" marL="1270000">
+              <a:buNone/>
+            </a:pPr>
+            <a:r>
+              <a:rPr sz="2000" b="1"/>
+              <a:t>📤 What to turn in before next class</a:t>
+            </a:r>
+          </a:p>
+          <a:p>
+            <a:pPr lvl="0" indent="0" marL="1270000">
+              <a:buNone/>
+            </a:pPr>
+            <a:r>
+              <a:rPr sz="2000"/>
+              <a:t>Upload both of these to the course management system:</a:t>
+            </a:r>
+          </a:p>
+          <a:p>
+            <a:pPr lvl="0" indent="-342900" marL="342900">
+              <a:buAutoNum type="arabicPeriod"/>
+            </a:pPr>
+            <a:r>
+              <a:rPr sz="2000"/>
+              <a:t>Your code — the </a:t>
+            </a:r>
+            <a:r>
+              <a:rPr sz="2000">
+                <a:latin typeface="Courier"/>
+              </a:rPr>
+              <a:t>scripts/</a:t>
+            </a:r>
+            <a:r>
+              <a:rPr sz="2000"/>
+              <a:t> folder (or just </a:t>
+            </a:r>
+            <a:r>
+              <a:rPr sz="2000">
+                <a:latin typeface="Courier"/>
+              </a:rPr>
+              <a:t>04_graphing_effectively.R</a:t>
+            </a:r>
+            <a:r>
+              <a:rPr sz="2000"/>
+              <a:t>) and the saved figure in </a:t>
+            </a:r>
+            <a:r>
+              <a:rPr sz="2000">
+                <a:latin typeface="Courier"/>
+              </a:rPr>
+              <a:t>figures/</a:t>
+            </a:r>
+          </a:p>
+          <a:p>
+            <a:pPr lvl="0" indent="-342900" marL="342900">
+              <a:buAutoNum type="arabicPeriod"/>
+            </a:pPr>
+            <a:r>
+              <a:rPr sz="2000"/>
+              <a:t>This worksheet, with your written answers</a:t>
+            </a:r>
+          </a:p>
+        </p:txBody>
+      </p:sp>
+    </p:spTree>
+  </p:cSld>
+</p:sld>
+</file>
+
+<file path=ppt/slides/slide15.xml><?xml version="1.0" encoding="utf-8"?>
+<p:sld xmlns:a="http://schemas.openxmlformats.org/drawingml/2006/main" xmlns:r="http://schemas.openxmlformats.org/officeDocument/2006/relationships" xmlns:p="http://schemas.openxmlformats.org/presentationml/2006/main">
+  <p:cSld>
+    <p:spTree>
+      <p:nvGrpSpPr>
+        <p:cNvPr id="1" name=""/>
+        <p:cNvGrpSpPr/>
+        <p:nvPr/>
+      </p:nvGrpSpPr>
+      <p:grpSpPr>
+        <a:xfrm>
+          <a:off x="0" y="0"/>
+          <a:ext cx="0" cy="0"/>
+          <a:chOff x="0" y="0"/>
+          <a:chExt cx="0" cy="0"/>
+        </a:xfrm>
+      </p:grpSpPr>
+      <p:sp>
+        <p:nvSpPr>
+          <p:cNvPr id="2" name="Title 1"/>
+          <p:cNvSpPr>
+            <a:spLocks noGrp="1"/>
+          </p:cNvSpPr>
+          <p:nvPr>
+            <p:ph type="title"/>
+          </p:nvPr>
+        </p:nvSpPr>
+        <p:spPr>
+          <a:xfrm>
+            <a:off x="0" y="0"/>
+            <a:ext cx="9144000" cy="582780"/>
+          </a:xfrm>
+        </p:spPr>
+        <p:txBody>
+          <a:bodyPr/>
+          <a:lstStyle/>
+          <a:p>
+            <a:pPr lvl="0" indent="0" marL="0">
+              <a:buNone/>
+            </a:pPr>
+            <a:r>
+              <a:rPr/>
               <a:t>Getting unstuck</a:t>
             </a:r>
           </a:p>
@@ -5628,7 +7993,13 @@
             </a:pPr>
             <a:r>
               <a:rPr/>
-              <a:t>Part 4 · Map a third variable with color</a:t>
+              <a:t>Part 3b · Axis labels and titles with </a:t>
+            </a:r>
+            <a:r>
+              <a:rPr>
+                <a:latin typeface="Courier"/>
+              </a:rPr>
+              <a:t>labs()</a:t>
             </a:r>
           </a:p>
         </p:txBody>
@@ -5667,7 +8038,26 @@
                 </a:solidFill>
                 <a:latin typeface="Courier"/>
               </a:rPr>
-              <a:t>pine_team_plot &lt;- </a:t>
+              <a:t>pine_labeled_plot &lt;- pine_box_plot </a:t>
+            </a:r>
+            <a:r>
+              <a:rPr>
+                <a:solidFill>
+                  <a:srgbClr val="5E5E5E"/>
+                </a:solidFill>
+                <a:latin typeface="Courier"/>
+              </a:rPr>
+              <a:t>+</a:t>
+            </a:r>
+            <a:br/>
+            <a:r>
+              <a:rPr>
+                <a:solidFill>
+                  <a:srgbClr val="003B4F"/>
+                </a:solidFill>
+                <a:latin typeface="Courier"/>
+              </a:rPr>
+              <a:t>  </a:t>
             </a:r>
             <a:r>
               <a:rPr>
@@ -5676,25 +8066,7 @@
                 </a:solidFill>
                 <a:latin typeface="Courier"/>
               </a:rPr>
-              <a:t>ggplot</a:t>
-            </a:r>
-            <a:r>
-              <a:rPr>
-                <a:solidFill>
-                  <a:srgbClr val="003B4F"/>
-                </a:solidFill>
-                <a:latin typeface="Courier"/>
-              </a:rPr>
-              <a:t>(pine_df, </a:t>
-            </a:r>
-            <a:r>
-              <a:rPr>
-                <a:solidFill>
-                  <a:srgbClr val="4758AB"/>
-                </a:solidFill>
-                <a:latin typeface="Courier"/>
-              </a:rPr>
-              <a:t>aes</a:t>
+              <a:t>labs</a:t>
             </a:r>
             <a:r>
               <a:rPr>
@@ -5705,6 +8077,16 @@
               </a:rPr>
               <a:t>(</a:t>
             </a:r>
+            <a:br/>
+            <a:r>
+              <a:rPr>
+                <a:solidFill>
+                  <a:srgbClr val="003B4F"/>
+                </a:solidFill>
+                <a:latin typeface="Courier"/>
+              </a:rPr>
+              <a:t>    </a:t>
+            </a:r>
             <a:r>
               <a:rPr>
                 <a:solidFill>
@@ -5712,16 +8094,44 @@
                 </a:solidFill>
                 <a:latin typeface="Courier"/>
               </a:rPr>
-              <a:t>x =</a:t>
-            </a:r>
-            <a:r>
-              <a:rPr>
-                <a:solidFill>
-                  <a:srgbClr val="003B4F"/>
-                </a:solidFill>
-                <a:latin typeface="Courier"/>
-              </a:rPr>
-              <a:t> n_s, </a:t>
+              <a:t>title    =</a:t>
+            </a:r>
+            <a:r>
+              <a:rPr>
+                <a:solidFill>
+                  <a:srgbClr val="003B4F"/>
+                </a:solidFill>
+                <a:latin typeface="Courier"/>
+              </a:rPr>
+              <a:t> </a:t>
+            </a:r>
+            <a:r>
+              <a:rPr>
+                <a:solidFill>
+                  <a:srgbClr val="20794D"/>
+                </a:solidFill>
+                <a:latin typeface="Courier"/>
+              </a:rPr>
+              <a:t>"Needle Length by Side of Tree"</a:t>
+            </a:r>
+            <a:r>
+              <a:rPr>
+                <a:solidFill>
+                  <a:srgbClr val="003B4F"/>
+                </a:solidFill>
+                <a:latin typeface="Courier"/>
+              </a:rPr>
+              <a:t>,</a:t>
+            </a:r>
+            <a:br/>
+            <a:r>
+              <a:rPr>
+                <a:solidFill>
+                  <a:srgbClr val="003B4F"/>
+                </a:solidFill>
+                <a:latin typeface="Courier"/>
+              </a:rPr>
+              <a:t>    </a:t>
             </a:r>
             <a:r>
               <a:rPr>
@@ -5730,16 +8140,44 @@
                 </a:solidFill>
                 <a:latin typeface="Courier"/>
               </a:rPr>
-              <a:t>y =</a:t>
-            </a:r>
-            <a:r>
-              <a:rPr>
-                <a:solidFill>
-                  <a:srgbClr val="003B4F"/>
-                </a:solidFill>
-                <a:latin typeface="Courier"/>
-              </a:rPr>
-              <a:t> length_mm, </a:t>
+              <a:t>subtitle =</a:t>
+            </a:r>
+            <a:r>
+              <a:rPr>
+                <a:solidFill>
+                  <a:srgbClr val="003B4F"/>
+                </a:solidFill>
+                <a:latin typeface="Courier"/>
+              </a:rPr>
+              <a:t> </a:t>
+            </a:r>
+            <a:r>
+              <a:rPr>
+                <a:solidFill>
+                  <a:srgbClr val="20794D"/>
+                </a:solidFill>
+                <a:latin typeface="Courier"/>
+              </a:rPr>
+              <a:t>"Four field teams, four trees"</a:t>
+            </a:r>
+            <a:r>
+              <a:rPr>
+                <a:solidFill>
+                  <a:srgbClr val="003B4F"/>
+                </a:solidFill>
+                <a:latin typeface="Courier"/>
+              </a:rPr>
+              <a:t>,</a:t>
+            </a:r>
+            <a:br/>
+            <a:r>
+              <a:rPr>
+                <a:solidFill>
+                  <a:srgbClr val="003B4F"/>
+                </a:solidFill>
+                <a:latin typeface="Courier"/>
+              </a:rPr>
+              <a:t>    </a:t>
             </a:r>
             <a:r>
               <a:rPr>
@@ -5748,25 +8186,34 @@
                 </a:solidFill>
                 <a:latin typeface="Courier"/>
               </a:rPr>
-              <a:t>color =</a:t>
-            </a:r>
-            <a:r>
-              <a:rPr>
-                <a:solidFill>
-                  <a:srgbClr val="003B4F"/>
-                </a:solidFill>
-                <a:latin typeface="Courier"/>
-              </a:rPr>
-              <a:t> group)) </a:t>
-            </a:r>
-            <a:r>
-              <a:rPr>
-                <a:solidFill>
-                  <a:srgbClr val="5E5E5E"/>
-                </a:solidFill>
-                <a:latin typeface="Courier"/>
-              </a:rPr>
-              <a:t>+</a:t>
+              <a:t>x        =</a:t>
+            </a:r>
+            <a:r>
+              <a:rPr>
+                <a:solidFill>
+                  <a:srgbClr val="003B4F"/>
+                </a:solidFill>
+                <a:latin typeface="Courier"/>
+              </a:rPr>
+              <a:t> </a:t>
+            </a:r>
+            <a:r>
+              <a:rPr>
+                <a:solidFill>
+                  <a:srgbClr val="20794D"/>
+                </a:solidFill>
+                <a:latin typeface="Courier"/>
+              </a:rPr>
+              <a:t>"Side of tree (lee = n, windward = s)"</a:t>
+            </a:r>
+            <a:r>
+              <a:rPr>
+                <a:solidFill>
+                  <a:srgbClr val="003B4F"/>
+                </a:solidFill>
+                <a:latin typeface="Courier"/>
+              </a:rPr>
+              <a:t>,</a:t>
             </a:r>
             <a:br/>
             <a:r>
@@ -5776,25 +8223,43 @@
                 </a:solidFill>
                 <a:latin typeface="Courier"/>
               </a:rPr>
-              <a:t>  </a:t>
-            </a:r>
-            <a:r>
-              <a:rPr>
-                <a:solidFill>
-                  <a:srgbClr val="4758AB"/>
-                </a:solidFill>
-                <a:latin typeface="Courier"/>
-              </a:rPr>
-              <a:t>geom_point</a:t>
-            </a:r>
-            <a:r>
-              <a:rPr>
-                <a:solidFill>
-                  <a:srgbClr val="003B4F"/>
-                </a:solidFill>
-                <a:latin typeface="Courier"/>
-              </a:rPr>
-              <a:t>(</a:t>
+              <a:t>    </a:t>
+            </a:r>
+            <a:r>
+              <a:rPr>
+                <a:solidFill>
+                  <a:srgbClr val="657422"/>
+                </a:solidFill>
+                <a:latin typeface="Courier"/>
+              </a:rPr>
+              <a:t>y        =</a:t>
+            </a:r>
+            <a:r>
+              <a:rPr>
+                <a:solidFill>
+                  <a:srgbClr val="003B4F"/>
+                </a:solidFill>
+                <a:latin typeface="Courier"/>
+              </a:rPr>
+              <a:t> </a:t>
+            </a:r>
+            <a:r>
+              <a:rPr>
+                <a:solidFill>
+                  <a:srgbClr val="20794D"/>
+                </a:solidFill>
+                <a:latin typeface="Courier"/>
+              </a:rPr>
+              <a:t>"Needle length (mm)"</a:t>
+            </a:r>
+            <a:r>
+              <a:rPr>
+                <a:solidFill>
+                  <a:srgbClr val="003B4F"/>
+                </a:solidFill>
+                <a:latin typeface="Courier"/>
+              </a:rPr>
+              <a:t>,</a:t>
             </a:r>
             <a:br/>
             <a:r>
@@ -5813,7 +8278,7 @@
                 </a:solidFill>
                 <a:latin typeface="Courier"/>
               </a:rPr>
-              <a:t>position =</a:t>
+              <a:t>fill     =</a:t>
             </a:r>
             <a:r>
               <a:rPr>
@@ -5827,20 +8292,30 @@
             <a:r>
               <a:rPr>
                 <a:solidFill>
-                  <a:srgbClr val="4758AB"/>
-                </a:solidFill>
-                <a:latin typeface="Courier"/>
-              </a:rPr>
-              <a:t>position_jitter</a:t>
-            </a:r>
-            <a:r>
-              <a:rPr>
-                <a:solidFill>
-                  <a:srgbClr val="003B4F"/>
-                </a:solidFill>
-                <a:latin typeface="Courier"/>
-              </a:rPr>
-              <a:t>(</a:t>
+                  <a:srgbClr val="20794D"/>
+                </a:solidFill>
+                <a:latin typeface="Courier"/>
+              </a:rPr>
+              <a:t>"Side"</a:t>
+            </a:r>
+            <a:r>
+              <a:rPr>
+                <a:solidFill>
+                  <a:srgbClr val="003B4F"/>
+                </a:solidFill>
+                <a:latin typeface="Courier"/>
+              </a:rPr>
+              <a:t>,</a:t>
+            </a:r>
+            <a:br/>
+            <a:r>
+              <a:rPr>
+                <a:solidFill>
+                  <a:srgbClr val="003B4F"/>
+                </a:solidFill>
+                <a:latin typeface="Courier"/>
+              </a:rPr>
+              <a:t>    </a:t>
             </a:r>
             <a:r>
               <a:rPr>
@@ -5849,7 +8324,7 @@
                 </a:solidFill>
                 <a:latin typeface="Courier"/>
               </a:rPr>
-              <a:t>width =</a:t>
+              <a:t>caption  =</a:t>
             </a:r>
             <a:r>
               <a:rPr>
@@ -5863,56 +8338,11 @@
             <a:r>
               <a:rPr>
                 <a:solidFill>
-                  <a:srgbClr val="AD0000"/>
-                </a:solidFill>
-                <a:latin typeface="Courier"/>
-              </a:rPr>
-              <a:t>0.15</a:t>
-            </a:r>
-            <a:r>
-              <a:rPr>
-                <a:solidFill>
-                  <a:srgbClr val="003B4F"/>
-                </a:solidFill>
-                <a:latin typeface="Courier"/>
-              </a:rPr>
-              <a:t>, </a:t>
-            </a:r>
-            <a:r>
-              <a:rPr>
-                <a:solidFill>
-                  <a:srgbClr val="657422"/>
-                </a:solidFill>
-                <a:latin typeface="Courier"/>
-              </a:rPr>
-              <a:t>seed =</a:t>
-            </a:r>
-            <a:r>
-              <a:rPr>
-                <a:solidFill>
-                  <a:srgbClr val="003B4F"/>
-                </a:solidFill>
-                <a:latin typeface="Courier"/>
-              </a:rPr>
-              <a:t> </a:t>
-            </a:r>
-            <a:r>
-              <a:rPr>
-                <a:solidFill>
-                  <a:srgbClr val="AD0000"/>
-                </a:solidFill>
-                <a:latin typeface="Courier"/>
-              </a:rPr>
-              <a:t>42</a:t>
-            </a:r>
-            <a:r>
-              <a:rPr>
-                <a:solidFill>
-                  <a:srgbClr val="003B4F"/>
-                </a:solidFill>
-                <a:latin typeface="Courier"/>
-              </a:rPr>
-              <a:t>),</a:t>
+                  <a:srgbClr val="20794D"/>
+                </a:solidFill>
+                <a:latin typeface="Courier"/>
+              </a:rPr>
+              <a:t>"Data: pine_needles.csv"</a:t>
             </a:r>
             <a:br/>
             <a:r>
@@ -5922,262 +8352,7 @@
                 </a:solidFill>
                 <a:latin typeface="Courier"/>
               </a:rPr>
-              <a:t>    </a:t>
-            </a:r>
-            <a:r>
-              <a:rPr>
-                <a:solidFill>
-                  <a:srgbClr val="657422"/>
-                </a:solidFill>
-                <a:latin typeface="Courier"/>
-              </a:rPr>
-              <a:t>size =</a:t>
-            </a:r>
-            <a:r>
-              <a:rPr>
-                <a:solidFill>
-                  <a:srgbClr val="003B4F"/>
-                </a:solidFill>
-                <a:latin typeface="Courier"/>
-              </a:rPr>
-              <a:t> </a:t>
-            </a:r>
-            <a:r>
-              <a:rPr>
-                <a:solidFill>
-                  <a:srgbClr val="AD0000"/>
-                </a:solidFill>
-                <a:latin typeface="Courier"/>
-              </a:rPr>
-              <a:t>2.5</a:t>
-            </a:r>
-            <a:r>
-              <a:rPr>
-                <a:solidFill>
-                  <a:srgbClr val="003B4F"/>
-                </a:solidFill>
-                <a:latin typeface="Courier"/>
-              </a:rPr>
-              <a:t>, </a:t>
-            </a:r>
-            <a:r>
-              <a:rPr>
-                <a:solidFill>
-                  <a:srgbClr val="657422"/>
-                </a:solidFill>
-                <a:latin typeface="Courier"/>
-              </a:rPr>
-              <a:t>alpha =</a:t>
-            </a:r>
-            <a:r>
-              <a:rPr>
-                <a:solidFill>
-                  <a:srgbClr val="003B4F"/>
-                </a:solidFill>
-                <a:latin typeface="Courier"/>
-              </a:rPr>
-              <a:t> </a:t>
-            </a:r>
-            <a:r>
-              <a:rPr>
-                <a:solidFill>
-                  <a:srgbClr val="AD0000"/>
-                </a:solidFill>
-                <a:latin typeface="Courier"/>
-              </a:rPr>
-              <a:t>0.8</a:t>
-            </a:r>
-            <a:br/>
-            <a:r>
-              <a:rPr>
-                <a:solidFill>
-                  <a:srgbClr val="003B4F"/>
-                </a:solidFill>
-                <a:latin typeface="Courier"/>
-              </a:rPr>
-              <a:t>  ) </a:t>
-            </a:r>
-            <a:r>
-              <a:rPr>
-                <a:solidFill>
-                  <a:srgbClr val="5E5E5E"/>
-                </a:solidFill>
-                <a:latin typeface="Courier"/>
-              </a:rPr>
-              <a:t>+</a:t>
-            </a:r>
-            <a:br/>
-            <a:r>
-              <a:rPr>
-                <a:solidFill>
-                  <a:srgbClr val="003B4F"/>
-                </a:solidFill>
-                <a:latin typeface="Courier"/>
-              </a:rPr>
-              <a:t>  </a:t>
-            </a:r>
-            <a:r>
-              <a:rPr>
-                <a:solidFill>
-                  <a:srgbClr val="4758AB"/>
-                </a:solidFill>
-                <a:latin typeface="Courier"/>
-              </a:rPr>
-              <a:t>labs</a:t>
-            </a:r>
-            <a:r>
-              <a:rPr>
-                <a:solidFill>
-                  <a:srgbClr val="003B4F"/>
-                </a:solidFill>
-                <a:latin typeface="Courier"/>
-              </a:rPr>
-              <a:t>(</a:t>
-            </a:r>
-            <a:r>
-              <a:rPr>
-                <a:solidFill>
-                  <a:srgbClr val="657422"/>
-                </a:solidFill>
-                <a:latin typeface="Courier"/>
-              </a:rPr>
-              <a:t>x =</a:t>
-            </a:r>
-            <a:r>
-              <a:rPr>
-                <a:solidFill>
-                  <a:srgbClr val="003B4F"/>
-                </a:solidFill>
-                <a:latin typeface="Courier"/>
-              </a:rPr>
-              <a:t> </a:t>
-            </a:r>
-            <a:r>
-              <a:rPr>
-                <a:solidFill>
-                  <a:srgbClr val="20794D"/>
-                </a:solidFill>
-                <a:latin typeface="Courier"/>
-              </a:rPr>
-              <a:t>"Side of tree"</a:t>
-            </a:r>
-            <a:r>
-              <a:rPr>
-                <a:solidFill>
-                  <a:srgbClr val="003B4F"/>
-                </a:solidFill>
-                <a:latin typeface="Courier"/>
-              </a:rPr>
-              <a:t>, </a:t>
-            </a:r>
-            <a:r>
-              <a:rPr>
-                <a:solidFill>
-                  <a:srgbClr val="657422"/>
-                </a:solidFill>
-                <a:latin typeface="Courier"/>
-              </a:rPr>
-              <a:t>y =</a:t>
-            </a:r>
-            <a:r>
-              <a:rPr>
-                <a:solidFill>
-                  <a:srgbClr val="003B4F"/>
-                </a:solidFill>
-                <a:latin typeface="Courier"/>
-              </a:rPr>
-              <a:t> </a:t>
-            </a:r>
-            <a:r>
-              <a:rPr>
-                <a:solidFill>
-                  <a:srgbClr val="20794D"/>
-                </a:solidFill>
-                <a:latin typeface="Courier"/>
-              </a:rPr>
-              <a:t>"Needle length (mm)"</a:t>
-            </a:r>
-            <a:r>
-              <a:rPr>
-                <a:solidFill>
-                  <a:srgbClr val="003B4F"/>
-                </a:solidFill>
-                <a:latin typeface="Courier"/>
-              </a:rPr>
-              <a:t>, </a:t>
-            </a:r>
-            <a:r>
-              <a:rPr>
-                <a:solidFill>
-                  <a:srgbClr val="657422"/>
-                </a:solidFill>
-                <a:latin typeface="Courier"/>
-              </a:rPr>
-              <a:t>color =</a:t>
-            </a:r>
-            <a:r>
-              <a:rPr>
-                <a:solidFill>
-                  <a:srgbClr val="003B4F"/>
-                </a:solidFill>
-                <a:latin typeface="Courier"/>
-              </a:rPr>
-              <a:t> </a:t>
-            </a:r>
-            <a:r>
-              <a:rPr>
-                <a:solidFill>
-                  <a:srgbClr val="20794D"/>
-                </a:solidFill>
-                <a:latin typeface="Courier"/>
-              </a:rPr>
-              <a:t>"Field team"</a:t>
-            </a:r>
-            <a:r>
-              <a:rPr>
-                <a:solidFill>
-                  <a:srgbClr val="003B4F"/>
-                </a:solidFill>
-                <a:latin typeface="Courier"/>
-              </a:rPr>
-              <a:t>) </a:t>
-            </a:r>
-            <a:r>
-              <a:rPr>
-                <a:solidFill>
-                  <a:srgbClr val="5E5E5E"/>
-                </a:solidFill>
-                <a:latin typeface="Courier"/>
-              </a:rPr>
-              <a:t>+</a:t>
-            </a:r>
-            <a:br/>
-            <a:r>
-              <a:rPr>
-                <a:solidFill>
-                  <a:srgbClr val="003B4F"/>
-                </a:solidFill>
-                <a:latin typeface="Courier"/>
-              </a:rPr>
-              <a:t>  </a:t>
-            </a:r>
-            <a:r>
-              <a:rPr>
-                <a:solidFill>
-                  <a:srgbClr val="4758AB"/>
-                </a:solidFill>
-                <a:latin typeface="Courier"/>
-              </a:rPr>
-              <a:t>theme_minimal</a:t>
-            </a:r>
-            <a:r>
-              <a:rPr>
-                <a:solidFill>
-                  <a:srgbClr val="003B4F"/>
-                </a:solidFill>
-                <a:latin typeface="Courier"/>
-              </a:rPr>
-              <a:t>()</a:t>
+              <a:t>  )</a:t>
             </a:r>
             <a:br/>
             <a:br/>
@@ -6188,7 +8363,7 @@
                 </a:solidFill>
                 <a:latin typeface="Courier"/>
               </a:rPr>
-              <a:t>pine_team_plot</a:t>
+              <a:t>pine_labeled_plot</a:t>
             </a:r>
           </a:p>
           <a:p>
@@ -6205,47 +8380,108 @@
             </a:r>
             <a:r>
               <a:rPr/>
-              <a:t> What’s the difference between writing </a:t>
-            </a:r>
-            <a:r>
-              <a:rPr>
-                <a:latin typeface="Courier"/>
-              </a:rPr>
-              <a:t>color = group</a:t>
+              <a:t> Change the </a:t>
+            </a:r>
+            <a:r>
+              <a:rPr>
+                <a:latin typeface="Courier"/>
+              </a:rPr>
+              <a:t>title</a:t>
             </a:r>
             <a:r>
               <a:rPr/>
-              <a:t> inside </a:t>
-            </a:r>
-            <a:r>
-              <a:rPr>
-                <a:latin typeface="Courier"/>
-              </a:rPr>
-              <a:t>aes()</a:t>
+              <a:t>, </a:t>
+            </a:r>
+            <a:r>
+              <a:rPr>
+                <a:latin typeface="Courier"/>
+              </a:rPr>
+              <a:t>x</a:t>
             </a:r>
             <a:r>
               <a:rPr/>
-              <a:t> versus writing </a:t>
-            </a:r>
-            <a:r>
-              <a:rPr>
-                <a:latin typeface="Courier"/>
-              </a:rPr>
-              <a:t>color = "steelblue"</a:t>
+              <a:t>, and </a:t>
+            </a:r>
+            <a:r>
+              <a:rPr>
+                <a:latin typeface="Courier"/>
+              </a:rPr>
+              <a:t>y</a:t>
             </a:r>
             <a:r>
               <a:rPr/>
-              <a:t> outside </a:t>
-            </a:r>
-            <a:r>
-              <a:rPr>
-                <a:latin typeface="Courier"/>
-              </a:rPr>
-              <a:t>aes()</a:t>
-            </a:r>
+              <a:t> text to your own wording. Re-run and confirm the plot updates.</a:t>
+            </a:r>
+          </a:p>
+          <a:p>
+            <a:pPr lvl="0" indent="0">
+              <a:buNone/>
+            </a:pPr>
+            <a:r>
+              <a:rPr>
+                <a:solidFill>
+                  <a:srgbClr val="5E5E5E"/>
+                </a:solidFill>
+                <a:latin typeface="Courier"/>
+              </a:rPr>
+              <a:t># Write your code here:</a:t>
+            </a:r>
+          </a:p>
+          <a:p>
+            <a:pPr lvl="0" indent="0" marL="0">
+              <a:buNone/>
+            </a:pPr>
             <a:r>
               <a:rPr/>
-              <a:t>? Try both and describe what changes.</a:t>
+              <a:t>✏️ </a:t>
+            </a:r>
+            <a:r>
+              <a:rPr b="1"/>
+              <a:t>Your turn:</a:t>
+            </a:r>
+            <a:r>
+              <a:rPr/>
+              <a:t> </a:t>
+            </a:r>
+            <a:r>
+              <a:rPr>
+                <a:latin typeface="Courier"/>
+              </a:rPr>
+              <a:t>pine_box_plot</a:t>
+            </a:r>
+            <a:r>
+              <a:rPr/>
+              <a:t> maps </a:t>
+            </a:r>
+            <a:r>
+              <a:rPr>
+                <a:latin typeface="Courier"/>
+              </a:rPr>
+              <a:t>fill = n_s</a:t>
+            </a:r>
+            <a:r>
+              <a:rPr/>
+              <a:t>. What happens if you write </a:t>
+            </a:r>
+            <a:r>
+              <a:rPr>
+                <a:latin typeface="Courier"/>
+              </a:rPr>
+              <a:t>labs(color = "Side")</a:t>
+            </a:r>
+            <a:r>
+              <a:rPr/>
+              <a:t> instead of </a:t>
+            </a:r>
+            <a:r>
+              <a:rPr>
+                <a:latin typeface="Courier"/>
+              </a:rPr>
+              <a:t>labs(fill = "Side")</a:t>
+            </a:r>
+            <a:r>
+              <a:rPr/>
+              <a:t>? Try it and explain why.</a:t>
             </a:r>
           </a:p>
           <a:p>
@@ -6254,12 +8490,9 @@
             </a:pPr>
             <a:r>
               <a:rPr>
-                <a:solidFill>
-                  <a:srgbClr val="5E5E5E"/>
-                </a:solidFill>
-                <a:latin typeface="Courier"/>
-              </a:rPr>
-              <a:t># Write your code here:</a:t>
+                <a:latin typeface="Courier"/>
+              </a:rPr>
+              <a:t>________________________________________________________</a:t>
             </a:r>
           </a:p>
         </p:txBody>
@@ -6311,7 +8544,7 @@
             </a:pPr>
             <a:r>
               <a:rPr/>
-              <a:t>Part 5 · Mean ± SE, plotted directly</a:t>
+              <a:t>Part 4 · Map a third variable with color</a:t>
             </a:r>
           </a:p>
         </p:txBody>
@@ -6350,7 +8583,7 @@
                 </a:solidFill>
                 <a:latin typeface="Courier"/>
               </a:rPr>
-              <a:t>pine_mean_se_plot &lt;- </a:t>
+              <a:t>pine_team_plot &lt;- </a:t>
             </a:r>
             <a:r>
               <a:rPr>
@@ -6440,7 +8673,7 @@
                 </a:solidFill>
                 <a:latin typeface="Courier"/>
               </a:rPr>
-              <a:t> n_s)) </a:t>
+              <a:t> group)) </a:t>
             </a:r>
             <a:r>
               <a:rPr>
@@ -6614,6 +8847,42 @@
                 </a:solidFill>
                 <a:latin typeface="Courier"/>
               </a:rPr>
+              <a:t>size =</a:t>
+            </a:r>
+            <a:r>
+              <a:rPr>
+                <a:solidFill>
+                  <a:srgbClr val="003B4F"/>
+                </a:solidFill>
+                <a:latin typeface="Courier"/>
+              </a:rPr>
+              <a:t> </a:t>
+            </a:r>
+            <a:r>
+              <a:rPr>
+                <a:solidFill>
+                  <a:srgbClr val="AD0000"/>
+                </a:solidFill>
+                <a:latin typeface="Courier"/>
+              </a:rPr>
+              <a:t>2.5</a:t>
+            </a:r>
+            <a:r>
+              <a:rPr>
+                <a:solidFill>
+                  <a:srgbClr val="003B4F"/>
+                </a:solidFill>
+                <a:latin typeface="Courier"/>
+              </a:rPr>
+              <a:t>, </a:t>
+            </a:r>
+            <a:r>
+              <a:rPr>
+                <a:solidFill>
+                  <a:srgbClr val="657422"/>
+                </a:solidFill>
+                <a:latin typeface="Courier"/>
+              </a:rPr>
               <a:t>alpha =</a:t>
             </a:r>
             <a:r>
@@ -6632,7 +8901,81 @@
                 </a:solidFill>
                 <a:latin typeface="Courier"/>
               </a:rPr>
-              <a:t>0.3</a:t>
+              <a:t>0.8</a:t>
+            </a:r>
+            <a:br/>
+            <a:r>
+              <a:rPr>
+                <a:solidFill>
+                  <a:srgbClr val="003B4F"/>
+                </a:solidFill>
+                <a:latin typeface="Courier"/>
+              </a:rPr>
+              <a:t>  ) </a:t>
+            </a:r>
+            <a:r>
+              <a:rPr>
+                <a:solidFill>
+                  <a:srgbClr val="5E5E5E"/>
+                </a:solidFill>
+                <a:latin typeface="Courier"/>
+              </a:rPr>
+              <a:t>+</a:t>
+            </a:r>
+            <a:br/>
+            <a:r>
+              <a:rPr>
+                <a:solidFill>
+                  <a:srgbClr val="003B4F"/>
+                </a:solidFill>
+                <a:latin typeface="Courier"/>
+              </a:rPr>
+              <a:t>  </a:t>
+            </a:r>
+            <a:r>
+              <a:rPr>
+                <a:solidFill>
+                  <a:srgbClr val="4758AB"/>
+                </a:solidFill>
+                <a:latin typeface="Courier"/>
+              </a:rPr>
+              <a:t>labs</a:t>
+            </a:r>
+            <a:r>
+              <a:rPr>
+                <a:solidFill>
+                  <a:srgbClr val="003B4F"/>
+                </a:solidFill>
+                <a:latin typeface="Courier"/>
+              </a:rPr>
+              <a:t>(</a:t>
+            </a:r>
+            <a:r>
+              <a:rPr>
+                <a:solidFill>
+                  <a:srgbClr val="657422"/>
+                </a:solidFill>
+                <a:latin typeface="Courier"/>
+              </a:rPr>
+              <a:t>x =</a:t>
+            </a:r>
+            <a:r>
+              <a:rPr>
+                <a:solidFill>
+                  <a:srgbClr val="003B4F"/>
+                </a:solidFill>
+                <a:latin typeface="Courier"/>
+              </a:rPr>
+              <a:t> </a:t>
+            </a:r>
+            <a:r>
+              <a:rPr>
+                <a:solidFill>
+                  <a:srgbClr val="20794D"/>
+                </a:solidFill>
+                <a:latin typeface="Courier"/>
+              </a:rPr>
+              <a:t>"Side of tree"</a:t>
             </a:r>
             <a:r>
               <a:rPr>
@@ -6650,7 +8993,7 @@
                 </a:solidFill>
                 <a:latin typeface="Courier"/>
               </a:rPr>
-              <a:t>size =</a:t>
+              <a:t>y =</a:t>
             </a:r>
             <a:r>
               <a:rPr>
@@ -6664,11 +9007,65 @@
             <a:r>
               <a:rPr>
                 <a:solidFill>
-                  <a:srgbClr val="AD0000"/>
-                </a:solidFill>
-                <a:latin typeface="Courier"/>
-              </a:rPr>
-              <a:t>2</a:t>
+                  <a:srgbClr val="20794D"/>
+                </a:solidFill>
+                <a:latin typeface="Courier"/>
+              </a:rPr>
+              <a:t>"Needle length (mm)"</a:t>
+            </a:r>
+            <a:r>
+              <a:rPr>
+                <a:solidFill>
+                  <a:srgbClr val="003B4F"/>
+                </a:solidFill>
+                <a:latin typeface="Courier"/>
+              </a:rPr>
+              <a:t>, </a:t>
+            </a:r>
+            <a:r>
+              <a:rPr>
+                <a:solidFill>
+                  <a:srgbClr val="657422"/>
+                </a:solidFill>
+                <a:latin typeface="Courier"/>
+              </a:rPr>
+              <a:t>color =</a:t>
+            </a:r>
+            <a:r>
+              <a:rPr>
+                <a:solidFill>
+                  <a:srgbClr val="003B4F"/>
+                </a:solidFill>
+                <a:latin typeface="Courier"/>
+              </a:rPr>
+              <a:t> </a:t>
+            </a:r>
+            <a:r>
+              <a:rPr>
+                <a:solidFill>
+                  <a:srgbClr val="20794D"/>
+                </a:solidFill>
+                <a:latin typeface="Courier"/>
+              </a:rPr>
+              <a:t>"Field team"</a:t>
+            </a:r>
+            <a:r>
+              <a:rPr>
+                <a:solidFill>
+                  <a:srgbClr val="003B4F"/>
+                </a:solidFill>
+                <a:latin typeface="Courier"/>
+              </a:rPr>
+              <a:t>) </a:t>
+            </a:r>
+            <a:r>
+              <a:rPr>
+                <a:solidFill>
+                  <a:srgbClr val="5E5E5E"/>
+                </a:solidFill>
+                <a:latin typeface="Courier"/>
+              </a:rPr>
+              <a:t>+</a:t>
             </a:r>
             <a:br/>
             <a:r>
@@ -6678,25 +9075,6 @@
                 </a:solidFill>
                 <a:latin typeface="Courier"/>
               </a:rPr>
-              <a:t>  ) </a:t>
-            </a:r>
-            <a:r>
-              <a:rPr>
-                <a:solidFill>
-                  <a:srgbClr val="5E5E5E"/>
-                </a:solidFill>
-                <a:latin typeface="Courier"/>
-              </a:rPr>
-              <a:t>+</a:t>
-            </a:r>
-            <a:br/>
-            <a:r>
-              <a:rPr>
-                <a:solidFill>
-                  <a:srgbClr val="003B4F"/>
-                </a:solidFill>
-                <a:latin typeface="Courier"/>
-              </a:rPr>
               <a:t>  </a:t>
             </a:r>
             <a:r>
@@ -6706,369 +9084,6 @@
                 </a:solidFill>
                 <a:latin typeface="Courier"/>
               </a:rPr>
-              <a:t>stat_summary</a:t>
-            </a:r>
-            <a:r>
-              <a:rPr>
-                <a:solidFill>
-                  <a:srgbClr val="003B4F"/>
-                </a:solidFill>
-                <a:latin typeface="Courier"/>
-              </a:rPr>
-              <a:t>(</a:t>
-            </a:r>
-            <a:r>
-              <a:rPr>
-                <a:solidFill>
-                  <a:srgbClr val="657422"/>
-                </a:solidFill>
-                <a:latin typeface="Courier"/>
-              </a:rPr>
-              <a:t>fun =</a:t>
-            </a:r>
-            <a:r>
-              <a:rPr>
-                <a:solidFill>
-                  <a:srgbClr val="003B4F"/>
-                </a:solidFill>
-                <a:latin typeface="Courier"/>
-              </a:rPr>
-              <a:t> mean, </a:t>
-            </a:r>
-            <a:r>
-              <a:rPr>
-                <a:solidFill>
-                  <a:srgbClr val="657422"/>
-                </a:solidFill>
-                <a:latin typeface="Courier"/>
-              </a:rPr>
-              <a:t>geom =</a:t>
-            </a:r>
-            <a:r>
-              <a:rPr>
-                <a:solidFill>
-                  <a:srgbClr val="003B4F"/>
-                </a:solidFill>
-                <a:latin typeface="Courier"/>
-              </a:rPr>
-              <a:t> </a:t>
-            </a:r>
-            <a:r>
-              <a:rPr>
-                <a:solidFill>
-                  <a:srgbClr val="20794D"/>
-                </a:solidFill>
-                <a:latin typeface="Courier"/>
-              </a:rPr>
-              <a:t>"point"</a:t>
-            </a:r>
-            <a:r>
-              <a:rPr>
-                <a:solidFill>
-                  <a:srgbClr val="003B4F"/>
-                </a:solidFill>
-                <a:latin typeface="Courier"/>
-              </a:rPr>
-              <a:t>, </a:t>
-            </a:r>
-            <a:r>
-              <a:rPr>
-                <a:solidFill>
-                  <a:srgbClr val="657422"/>
-                </a:solidFill>
-                <a:latin typeface="Courier"/>
-              </a:rPr>
-              <a:t>size =</a:t>
-            </a:r>
-            <a:r>
-              <a:rPr>
-                <a:solidFill>
-                  <a:srgbClr val="003B4F"/>
-                </a:solidFill>
-                <a:latin typeface="Courier"/>
-              </a:rPr>
-              <a:t> </a:t>
-            </a:r>
-            <a:r>
-              <a:rPr>
-                <a:solidFill>
-                  <a:srgbClr val="AD0000"/>
-                </a:solidFill>
-                <a:latin typeface="Courier"/>
-              </a:rPr>
-              <a:t>4</a:t>
-            </a:r>
-            <a:r>
-              <a:rPr>
-                <a:solidFill>
-                  <a:srgbClr val="003B4F"/>
-                </a:solidFill>
-                <a:latin typeface="Courier"/>
-              </a:rPr>
-              <a:t>) </a:t>
-            </a:r>
-            <a:r>
-              <a:rPr>
-                <a:solidFill>
-                  <a:srgbClr val="5E5E5E"/>
-                </a:solidFill>
-                <a:latin typeface="Courier"/>
-              </a:rPr>
-              <a:t>+</a:t>
-            </a:r>
-            <a:br/>
-            <a:r>
-              <a:rPr>
-                <a:solidFill>
-                  <a:srgbClr val="003B4F"/>
-                </a:solidFill>
-                <a:latin typeface="Courier"/>
-              </a:rPr>
-              <a:t>  </a:t>
-            </a:r>
-            <a:r>
-              <a:rPr>
-                <a:solidFill>
-                  <a:srgbClr val="4758AB"/>
-                </a:solidFill>
-                <a:latin typeface="Courier"/>
-              </a:rPr>
-              <a:t>stat_summary</a:t>
-            </a:r>
-            <a:r>
-              <a:rPr>
-                <a:solidFill>
-                  <a:srgbClr val="003B4F"/>
-                </a:solidFill>
-                <a:latin typeface="Courier"/>
-              </a:rPr>
-              <a:t>(</a:t>
-            </a:r>
-            <a:r>
-              <a:rPr>
-                <a:solidFill>
-                  <a:srgbClr val="657422"/>
-                </a:solidFill>
-                <a:latin typeface="Courier"/>
-              </a:rPr>
-              <a:t>fun.data =</a:t>
-            </a:r>
-            <a:r>
-              <a:rPr>
-                <a:solidFill>
-                  <a:srgbClr val="003B4F"/>
-                </a:solidFill>
-                <a:latin typeface="Courier"/>
-              </a:rPr>
-              <a:t> mean_se, </a:t>
-            </a:r>
-            <a:r>
-              <a:rPr>
-                <a:solidFill>
-                  <a:srgbClr val="657422"/>
-                </a:solidFill>
-                <a:latin typeface="Courier"/>
-              </a:rPr>
-              <a:t>geom =</a:t>
-            </a:r>
-            <a:r>
-              <a:rPr>
-                <a:solidFill>
-                  <a:srgbClr val="003B4F"/>
-                </a:solidFill>
-                <a:latin typeface="Courier"/>
-              </a:rPr>
-              <a:t> </a:t>
-            </a:r>
-            <a:r>
-              <a:rPr>
-                <a:solidFill>
-                  <a:srgbClr val="20794D"/>
-                </a:solidFill>
-                <a:latin typeface="Courier"/>
-              </a:rPr>
-              <a:t>"errorbar"</a:t>
-            </a:r>
-            <a:r>
-              <a:rPr>
-                <a:solidFill>
-                  <a:srgbClr val="003B4F"/>
-                </a:solidFill>
-                <a:latin typeface="Courier"/>
-              </a:rPr>
-              <a:t>, </a:t>
-            </a:r>
-            <a:r>
-              <a:rPr>
-                <a:solidFill>
-                  <a:srgbClr val="657422"/>
-                </a:solidFill>
-                <a:latin typeface="Courier"/>
-              </a:rPr>
-              <a:t>width =</a:t>
-            </a:r>
-            <a:r>
-              <a:rPr>
-                <a:solidFill>
-                  <a:srgbClr val="003B4F"/>
-                </a:solidFill>
-                <a:latin typeface="Courier"/>
-              </a:rPr>
-              <a:t> </a:t>
-            </a:r>
-            <a:r>
-              <a:rPr>
-                <a:solidFill>
-                  <a:srgbClr val="AD0000"/>
-                </a:solidFill>
-                <a:latin typeface="Courier"/>
-              </a:rPr>
-              <a:t>0.15</a:t>
-            </a:r>
-            <a:r>
-              <a:rPr>
-                <a:solidFill>
-                  <a:srgbClr val="003B4F"/>
-                </a:solidFill>
-                <a:latin typeface="Courier"/>
-              </a:rPr>
-              <a:t>) </a:t>
-            </a:r>
-            <a:r>
-              <a:rPr>
-                <a:solidFill>
-                  <a:srgbClr val="5E5E5E"/>
-                </a:solidFill>
-                <a:latin typeface="Courier"/>
-              </a:rPr>
-              <a:t>+</a:t>
-            </a:r>
-            <a:br/>
-            <a:r>
-              <a:rPr>
-                <a:solidFill>
-                  <a:srgbClr val="003B4F"/>
-                </a:solidFill>
-                <a:latin typeface="Courier"/>
-              </a:rPr>
-              <a:t>  </a:t>
-            </a:r>
-            <a:r>
-              <a:rPr>
-                <a:solidFill>
-                  <a:srgbClr val="4758AB"/>
-                </a:solidFill>
-                <a:latin typeface="Courier"/>
-              </a:rPr>
-              <a:t>labs</a:t>
-            </a:r>
-            <a:r>
-              <a:rPr>
-                <a:solidFill>
-                  <a:srgbClr val="003B4F"/>
-                </a:solidFill>
-                <a:latin typeface="Courier"/>
-              </a:rPr>
-              <a:t>(</a:t>
-            </a:r>
-            <a:r>
-              <a:rPr>
-                <a:solidFill>
-                  <a:srgbClr val="657422"/>
-                </a:solidFill>
-                <a:latin typeface="Courier"/>
-              </a:rPr>
-              <a:t>x =</a:t>
-            </a:r>
-            <a:r>
-              <a:rPr>
-                <a:solidFill>
-                  <a:srgbClr val="003B4F"/>
-                </a:solidFill>
-                <a:latin typeface="Courier"/>
-              </a:rPr>
-              <a:t> </a:t>
-            </a:r>
-            <a:r>
-              <a:rPr>
-                <a:solidFill>
-                  <a:srgbClr val="20794D"/>
-                </a:solidFill>
-                <a:latin typeface="Courier"/>
-              </a:rPr>
-              <a:t>"Side of tree"</a:t>
-            </a:r>
-            <a:r>
-              <a:rPr>
-                <a:solidFill>
-                  <a:srgbClr val="003B4F"/>
-                </a:solidFill>
-                <a:latin typeface="Courier"/>
-              </a:rPr>
-              <a:t>, </a:t>
-            </a:r>
-            <a:r>
-              <a:rPr>
-                <a:solidFill>
-                  <a:srgbClr val="657422"/>
-                </a:solidFill>
-                <a:latin typeface="Courier"/>
-              </a:rPr>
-              <a:t>y =</a:t>
-            </a:r>
-            <a:r>
-              <a:rPr>
-                <a:solidFill>
-                  <a:srgbClr val="003B4F"/>
-                </a:solidFill>
-                <a:latin typeface="Courier"/>
-              </a:rPr>
-              <a:t> </a:t>
-            </a:r>
-            <a:r>
-              <a:rPr>
-                <a:solidFill>
-                  <a:srgbClr val="20794D"/>
-                </a:solidFill>
-                <a:latin typeface="Courier"/>
-              </a:rPr>
-              <a:t>"Needle length (mm)"</a:t>
-            </a:r>
-            <a:r>
-              <a:rPr>
-                <a:solidFill>
-                  <a:srgbClr val="003B4F"/>
-                </a:solidFill>
-                <a:latin typeface="Courier"/>
-              </a:rPr>
-              <a:t>) </a:t>
-            </a:r>
-            <a:r>
-              <a:rPr>
-                <a:solidFill>
-                  <a:srgbClr val="5E5E5E"/>
-                </a:solidFill>
-                <a:latin typeface="Courier"/>
-              </a:rPr>
-              <a:t>+</a:t>
-            </a:r>
-            <a:br/>
-            <a:r>
-              <a:rPr>
-                <a:solidFill>
-                  <a:srgbClr val="003B4F"/>
-                </a:solidFill>
-                <a:latin typeface="Courier"/>
-              </a:rPr>
-              <a:t>  </a:t>
-            </a:r>
-            <a:r>
-              <a:rPr>
-                <a:solidFill>
-                  <a:srgbClr val="4758AB"/>
-                </a:solidFill>
-                <a:latin typeface="Courier"/>
-              </a:rPr>
               <a:t>theme_minimal</a:t>
             </a:r>
             <a:r>
@@ -7078,80 +9093,7 @@
                 </a:solidFill>
                 <a:latin typeface="Courier"/>
               </a:rPr>
-              <a:t>() </a:t>
-            </a:r>
-            <a:r>
-              <a:rPr>
-                <a:solidFill>
-                  <a:srgbClr val="5E5E5E"/>
-                </a:solidFill>
-                <a:latin typeface="Courier"/>
-              </a:rPr>
-              <a:t>+</a:t>
-            </a:r>
-            <a:br/>
-            <a:r>
-              <a:rPr>
-                <a:solidFill>
-                  <a:srgbClr val="003B4F"/>
-                </a:solidFill>
-                <a:latin typeface="Courier"/>
-              </a:rPr>
-              <a:t>  </a:t>
-            </a:r>
-            <a:r>
-              <a:rPr>
-                <a:solidFill>
-                  <a:srgbClr val="4758AB"/>
-                </a:solidFill>
-                <a:latin typeface="Courier"/>
-              </a:rPr>
-              <a:t>theme</a:t>
-            </a:r>
-            <a:r>
-              <a:rPr>
-                <a:solidFill>
-                  <a:srgbClr val="003B4F"/>
-                </a:solidFill>
-                <a:latin typeface="Courier"/>
-              </a:rPr>
-              <a:t>(</a:t>
-            </a:r>
-            <a:r>
-              <a:rPr>
-                <a:solidFill>
-                  <a:srgbClr val="657422"/>
-                </a:solidFill>
-                <a:latin typeface="Courier"/>
-              </a:rPr>
-              <a:t>legend.position =</a:t>
-            </a:r>
-            <a:r>
-              <a:rPr>
-                <a:solidFill>
-                  <a:srgbClr val="003B4F"/>
-                </a:solidFill>
-                <a:latin typeface="Courier"/>
-              </a:rPr>
-              <a:t> </a:t>
-            </a:r>
-            <a:r>
-              <a:rPr>
-                <a:solidFill>
-                  <a:srgbClr val="20794D"/>
-                </a:solidFill>
-                <a:latin typeface="Courier"/>
-              </a:rPr>
-              <a:t>"none"</a:t>
-            </a:r>
-            <a:r>
-              <a:rPr>
-                <a:solidFill>
-                  <a:srgbClr val="003B4F"/>
-                </a:solidFill>
-                <a:latin typeface="Courier"/>
-              </a:rPr>
-              <a:t>)</a:t>
+              <a:t>()</a:t>
             </a:r>
             <a:br/>
             <a:br/>
@@ -7162,7 +9104,7 @@
                 </a:solidFill>
                 <a:latin typeface="Courier"/>
               </a:rPr>
-              <a:t>pine_mean_se_plot</a:t>
+              <a:t>pine_team_plot</a:t>
             </a:r>
           </a:p>
           <a:p>
@@ -7179,17 +9121,47 @@
             </a:r>
             <a:r>
               <a:rPr/>
-              <a:t> Which two </a:t>
-            </a:r>
-            <a:r>
-              <a:rPr>
-                <a:latin typeface="Courier"/>
-              </a:rPr>
-              <a:t>stat_summary()</a:t>
+              <a:t> What’s the difference between writing </a:t>
+            </a:r>
+            <a:r>
+              <a:rPr>
+                <a:latin typeface="Courier"/>
+              </a:rPr>
+              <a:t>color = group</a:t>
             </a:r>
             <a:r>
               <a:rPr/>
-              <a:t> calls compute the mean point and the SE error bars? Copy them below and label which is which.</a:t>
+              <a:t> inside </a:t>
+            </a:r>
+            <a:r>
+              <a:rPr>
+                <a:latin typeface="Courier"/>
+              </a:rPr>
+              <a:t>aes()</a:t>
+            </a:r>
+            <a:r>
+              <a:rPr/>
+              <a:t> versus writing </a:t>
+            </a:r>
+            <a:r>
+              <a:rPr>
+                <a:latin typeface="Courier"/>
+              </a:rPr>
+              <a:t>color = "steelblue"</a:t>
+            </a:r>
+            <a:r>
+              <a:rPr/>
+              <a:t> outside </a:t>
+            </a:r>
+            <a:r>
+              <a:rPr>
+                <a:latin typeface="Courier"/>
+              </a:rPr>
+              <a:t>aes()</a:t>
+            </a:r>
+            <a:r>
+              <a:rPr/>
+              <a:t>? Try both and describe what changes.</a:t>
             </a:r>
           </a:p>
           <a:p>
@@ -7198,10 +9170,12 @@
             </a:pPr>
             <a:r>
               <a:rPr>
-                <a:latin typeface="Courier"/>
-              </a:rPr>
-              <a:t>Mean point:   ________________________
-SE bars:      ________________________</a:t>
+                <a:solidFill>
+                  <a:srgbClr val="5E5E5E"/>
+                </a:solidFill>
+                <a:latin typeface="Courier"/>
+              </a:rPr>
+              <a:t># Write your code here:</a:t>
             </a:r>
           </a:p>
         </p:txBody>
@@ -7253,7 +9227,7 @@
             </a:pPr>
             <a:r>
               <a:rPr/>
-              <a:t>Part 6 · Facet by field team</a:t>
+              <a:t>Part 4b · Histograms and density curves</a:t>
             </a:r>
           </a:p>
         </p:txBody>
@@ -7288,11 +9262,56 @@
             <a:r>
               <a:rPr>
                 <a:solidFill>
-                  <a:srgbClr val="003B4F"/>
-                </a:solidFill>
-                <a:latin typeface="Courier"/>
-              </a:rPr>
-              <a:t>pine_facet_plot &lt;- pine_box_plot </a:t>
+                  <a:srgbClr val="4758AB"/>
+                </a:solidFill>
+                <a:latin typeface="Courier"/>
+              </a:rPr>
+              <a:t>ggplot</a:t>
+            </a:r>
+            <a:r>
+              <a:rPr>
+                <a:solidFill>
+                  <a:srgbClr val="003B4F"/>
+                </a:solidFill>
+                <a:latin typeface="Courier"/>
+              </a:rPr>
+              <a:t>(pine_df, </a:t>
+            </a:r>
+            <a:r>
+              <a:rPr>
+                <a:solidFill>
+                  <a:srgbClr val="4758AB"/>
+                </a:solidFill>
+                <a:latin typeface="Courier"/>
+              </a:rPr>
+              <a:t>aes</a:t>
+            </a:r>
+            <a:r>
+              <a:rPr>
+                <a:solidFill>
+                  <a:srgbClr val="003B4F"/>
+                </a:solidFill>
+                <a:latin typeface="Courier"/>
+              </a:rPr>
+              <a:t>(</a:t>
+            </a:r>
+            <a:r>
+              <a:rPr>
+                <a:solidFill>
+                  <a:srgbClr val="657422"/>
+                </a:solidFill>
+                <a:latin typeface="Courier"/>
+              </a:rPr>
+              <a:t>x =</a:t>
+            </a:r>
+            <a:r>
+              <a:rPr>
+                <a:solidFill>
+                  <a:srgbClr val="003B4F"/>
+                </a:solidFill>
+                <a:latin typeface="Courier"/>
+              </a:rPr>
+              <a:t> length_mm)) </a:t>
             </a:r>
             <a:r>
               <a:rPr>
@@ -7320,7 +9339,7 @@
                 </a:solidFill>
                 <a:latin typeface="Courier"/>
               </a:rPr>
-              <a:t>facet_wrap</a:t>
+              <a:t>geom_histogram</a:t>
             </a:r>
             <a:r>
               <a:rPr>
@@ -7334,22 +9353,265 @@
             <a:r>
               <a:rPr>
                 <a:solidFill>
+                  <a:srgbClr val="657422"/>
+                </a:solidFill>
+                <a:latin typeface="Courier"/>
+              </a:rPr>
+              <a:t>binwidth =</a:t>
+            </a:r>
+            <a:r>
+              <a:rPr>
+                <a:solidFill>
+                  <a:srgbClr val="003B4F"/>
+                </a:solidFill>
+                <a:latin typeface="Courier"/>
+              </a:rPr>
+              <a:t> </a:t>
+            </a:r>
+            <a:r>
+              <a:rPr>
+                <a:solidFill>
+                  <a:srgbClr val="AD0000"/>
+                </a:solidFill>
+                <a:latin typeface="Courier"/>
+              </a:rPr>
+              <a:t>2</a:t>
+            </a:r>
+            <a:r>
+              <a:rPr>
+                <a:solidFill>
+                  <a:srgbClr val="003B4F"/>
+                </a:solidFill>
+                <a:latin typeface="Courier"/>
+              </a:rPr>
+              <a:t>, </a:t>
+            </a:r>
+            <a:r>
+              <a:rPr>
+                <a:solidFill>
+                  <a:srgbClr val="657422"/>
+                </a:solidFill>
+                <a:latin typeface="Courier"/>
+              </a:rPr>
+              <a:t>fill =</a:t>
+            </a:r>
+            <a:r>
+              <a:rPr>
+                <a:solidFill>
+                  <a:srgbClr val="003B4F"/>
+                </a:solidFill>
+                <a:latin typeface="Courier"/>
+              </a:rPr>
+              <a:t> </a:t>
+            </a:r>
+            <a:r>
+              <a:rPr>
+                <a:solidFill>
+                  <a:srgbClr val="20794D"/>
+                </a:solidFill>
+                <a:latin typeface="Courier"/>
+              </a:rPr>
+              <a:t>"steelblue"</a:t>
+            </a:r>
+            <a:r>
+              <a:rPr>
+                <a:solidFill>
+                  <a:srgbClr val="003B4F"/>
+                </a:solidFill>
+                <a:latin typeface="Courier"/>
+              </a:rPr>
+              <a:t>, </a:t>
+            </a:r>
+            <a:r>
+              <a:rPr>
+                <a:solidFill>
+                  <a:srgbClr val="657422"/>
+                </a:solidFill>
+                <a:latin typeface="Courier"/>
+              </a:rPr>
+              <a:t>color =</a:t>
+            </a:r>
+            <a:r>
+              <a:rPr>
+                <a:solidFill>
+                  <a:srgbClr val="003B4F"/>
+                </a:solidFill>
+                <a:latin typeface="Courier"/>
+              </a:rPr>
+              <a:t> </a:t>
+            </a:r>
+            <a:r>
+              <a:rPr>
+                <a:solidFill>
+                  <a:srgbClr val="20794D"/>
+                </a:solidFill>
+                <a:latin typeface="Courier"/>
+              </a:rPr>
+              <a:t>"white"</a:t>
+            </a:r>
+            <a:r>
+              <a:rPr>
+                <a:solidFill>
+                  <a:srgbClr val="003B4F"/>
+                </a:solidFill>
+                <a:latin typeface="Courier"/>
+              </a:rPr>
+              <a:t>) </a:t>
+            </a:r>
+            <a:r>
+              <a:rPr>
+                <a:solidFill>
                   <a:srgbClr val="5E5E5E"/>
                 </a:solidFill>
                 <a:latin typeface="Courier"/>
               </a:rPr>
-              <a:t>~</a:t>
-            </a:r>
-            <a:r>
-              <a:rPr>
-                <a:solidFill>
-                  <a:srgbClr val="003B4F"/>
-                </a:solidFill>
-                <a:latin typeface="Courier"/>
-              </a:rPr>
-              <a:t>group)</a:t>
+              <a:t>+</a:t>
             </a:r>
             <a:br/>
+            <a:r>
+              <a:rPr>
+                <a:solidFill>
+                  <a:srgbClr val="003B4F"/>
+                </a:solidFill>
+                <a:latin typeface="Courier"/>
+              </a:rPr>
+              <a:t>  </a:t>
+            </a:r>
+            <a:r>
+              <a:rPr>
+                <a:solidFill>
+                  <a:srgbClr val="4758AB"/>
+                </a:solidFill>
+                <a:latin typeface="Courier"/>
+              </a:rPr>
+              <a:t>labs</a:t>
+            </a:r>
+            <a:r>
+              <a:rPr>
+                <a:solidFill>
+                  <a:srgbClr val="003B4F"/>
+                </a:solidFill>
+                <a:latin typeface="Courier"/>
+              </a:rPr>
+              <a:t>(</a:t>
+            </a:r>
+            <a:r>
+              <a:rPr>
+                <a:solidFill>
+                  <a:srgbClr val="657422"/>
+                </a:solidFill>
+                <a:latin typeface="Courier"/>
+              </a:rPr>
+              <a:t>title =</a:t>
+            </a:r>
+            <a:r>
+              <a:rPr>
+                <a:solidFill>
+                  <a:srgbClr val="003B4F"/>
+                </a:solidFill>
+                <a:latin typeface="Courier"/>
+              </a:rPr>
+              <a:t> </a:t>
+            </a:r>
+            <a:r>
+              <a:rPr>
+                <a:solidFill>
+                  <a:srgbClr val="20794D"/>
+                </a:solidFill>
+                <a:latin typeface="Courier"/>
+              </a:rPr>
+              <a:t>"Distribution of Needle Length"</a:t>
+            </a:r>
+            <a:r>
+              <a:rPr>
+                <a:solidFill>
+                  <a:srgbClr val="003B4F"/>
+                </a:solidFill>
+                <a:latin typeface="Courier"/>
+              </a:rPr>
+              <a:t>, </a:t>
+            </a:r>
+            <a:r>
+              <a:rPr>
+                <a:solidFill>
+                  <a:srgbClr val="657422"/>
+                </a:solidFill>
+                <a:latin typeface="Courier"/>
+              </a:rPr>
+              <a:t>x =</a:t>
+            </a:r>
+            <a:r>
+              <a:rPr>
+                <a:solidFill>
+                  <a:srgbClr val="003B4F"/>
+                </a:solidFill>
+                <a:latin typeface="Courier"/>
+              </a:rPr>
+              <a:t> </a:t>
+            </a:r>
+            <a:r>
+              <a:rPr>
+                <a:solidFill>
+                  <a:srgbClr val="20794D"/>
+                </a:solidFill>
+                <a:latin typeface="Courier"/>
+              </a:rPr>
+              <a:t>"Needle length (mm)"</a:t>
+            </a:r>
+            <a:r>
+              <a:rPr>
+                <a:solidFill>
+                  <a:srgbClr val="003B4F"/>
+                </a:solidFill>
+                <a:latin typeface="Courier"/>
+              </a:rPr>
+              <a:t>, </a:t>
+            </a:r>
+            <a:r>
+              <a:rPr>
+                <a:solidFill>
+                  <a:srgbClr val="657422"/>
+                </a:solidFill>
+                <a:latin typeface="Courier"/>
+              </a:rPr>
+              <a:t>y =</a:t>
+            </a:r>
+            <a:r>
+              <a:rPr>
+                <a:solidFill>
+                  <a:srgbClr val="003B4F"/>
+                </a:solidFill>
+                <a:latin typeface="Courier"/>
+              </a:rPr>
+              <a:t> </a:t>
+            </a:r>
+            <a:r>
+              <a:rPr>
+                <a:solidFill>
+                  <a:srgbClr val="20794D"/>
+                </a:solidFill>
+                <a:latin typeface="Courier"/>
+              </a:rPr>
+              <a:t>"Count"</a:t>
+            </a:r>
+            <a:r>
+              <a:rPr>
+                <a:solidFill>
+                  <a:srgbClr val="003B4F"/>
+                </a:solidFill>
+                <a:latin typeface="Courier"/>
+              </a:rPr>
+              <a:t>) </a:t>
+            </a:r>
+            <a:r>
+              <a:rPr>
+                <a:solidFill>
+                  <a:srgbClr val="5E5E5E"/>
+                </a:solidFill>
+                <a:latin typeface="Courier"/>
+              </a:rPr>
+              <a:t>+</a:t>
+            </a:r>
             <a:br/>
             <a:r>
               <a:rPr>
@@ -7358,7 +9620,25 @@
                 </a:solidFill>
                 <a:latin typeface="Courier"/>
               </a:rPr>
-              <a:t>pine_facet_plot</a:t>
+              <a:t>  </a:t>
+            </a:r>
+            <a:r>
+              <a:rPr>
+                <a:solidFill>
+                  <a:srgbClr val="4758AB"/>
+                </a:solidFill>
+                <a:latin typeface="Courier"/>
+              </a:rPr>
+              <a:t>theme_minimal</a:t>
+            </a:r>
+            <a:r>
+              <a:rPr>
+                <a:solidFill>
+                  <a:srgbClr val="003B4F"/>
+                </a:solidFill>
+                <a:latin typeface="Courier"/>
+              </a:rPr>
+              <a:t>()</a:t>
             </a:r>
           </a:p>
           <a:p>
@@ -7375,13 +9655,447 @@
             </a:r>
             <a:r>
               <a:rPr/>
-              <a:t> Looking at the four panels, does every field team show the same lee-vs-windward pattern, or does one team look different? </a:t>
+              <a:t> Try </a:t>
+            </a:r>
+            <a:r>
+              <a:rPr>
+                <a:latin typeface="Courier"/>
+              </a:rPr>
+              <a:t>binwidth = 0.5</a:t>
+            </a:r>
+            <a:r>
+              <a:rPr/>
+              <a:t> and </a:t>
+            </a:r>
+            <a:r>
+              <a:rPr>
+                <a:latin typeface="Courier"/>
+              </a:rPr>
+              <a:t>binwidth = 5</a:t>
+            </a:r>
+            <a:r>
+              <a:rPr/>
+              <a:t>. Which value tells the real story about this data, and which one hides or exaggerates it?</a:t>
+            </a:r>
+          </a:p>
+          <a:p>
+            <a:pPr lvl="0" indent="0">
+              <a:buNone/>
+            </a:pPr>
+            <a:r>
+              <a:rPr>
+                <a:solidFill>
+                  <a:srgbClr val="5E5E5E"/>
+                </a:solidFill>
+                <a:latin typeface="Courier"/>
+              </a:rPr>
+              <a:t># Write your code here:</a:t>
+            </a:r>
+          </a:p>
+          <a:p>
+            <a:pPr lvl="0" indent="0" marL="0">
+              <a:buNone/>
+            </a:pPr>
+            <a:r>
+              <a:rPr b="1"/>
+              <a:t>▶ Run this:</a:t>
+            </a:r>
+          </a:p>
+          <a:p>
+            <a:pPr lvl="0" indent="0">
+              <a:buNone/>
+            </a:pPr>
+            <a:r>
+              <a:rPr>
+                <a:solidFill>
+                  <a:srgbClr val="4758AB"/>
+                </a:solidFill>
+                <a:latin typeface="Courier"/>
+              </a:rPr>
+              <a:t>ggplot</a:t>
+            </a:r>
+            <a:r>
+              <a:rPr>
+                <a:solidFill>
+                  <a:srgbClr val="003B4F"/>
+                </a:solidFill>
+                <a:latin typeface="Courier"/>
+              </a:rPr>
+              <a:t>(pine_df, </a:t>
+            </a:r>
+            <a:r>
+              <a:rPr>
+                <a:solidFill>
+                  <a:srgbClr val="4758AB"/>
+                </a:solidFill>
+                <a:latin typeface="Courier"/>
+              </a:rPr>
+              <a:t>aes</a:t>
+            </a:r>
+            <a:r>
+              <a:rPr>
+                <a:solidFill>
+                  <a:srgbClr val="003B4F"/>
+                </a:solidFill>
+                <a:latin typeface="Courier"/>
+              </a:rPr>
+              <a:t>(</a:t>
+            </a:r>
+            <a:r>
+              <a:rPr>
+                <a:solidFill>
+                  <a:srgbClr val="657422"/>
+                </a:solidFill>
+                <a:latin typeface="Courier"/>
+              </a:rPr>
+              <a:t>x =</a:t>
+            </a:r>
+            <a:r>
+              <a:rPr>
+                <a:solidFill>
+                  <a:srgbClr val="003B4F"/>
+                </a:solidFill>
+                <a:latin typeface="Courier"/>
+              </a:rPr>
+              <a:t> length_mm, </a:t>
+            </a:r>
+            <a:r>
+              <a:rPr>
+                <a:solidFill>
+                  <a:srgbClr val="657422"/>
+                </a:solidFill>
+                <a:latin typeface="Courier"/>
+              </a:rPr>
+              <a:t>fill =</a:t>
+            </a:r>
+            <a:r>
+              <a:rPr>
+                <a:solidFill>
+                  <a:srgbClr val="003B4F"/>
+                </a:solidFill>
+                <a:latin typeface="Courier"/>
+              </a:rPr>
+              <a:t> n_s)) </a:t>
+            </a:r>
+            <a:r>
+              <a:rPr>
+                <a:solidFill>
+                  <a:srgbClr val="5E5E5E"/>
+                </a:solidFill>
+                <a:latin typeface="Courier"/>
+              </a:rPr>
+              <a:t>+</a:t>
+            </a:r>
+            <a:br/>
+            <a:r>
+              <a:rPr>
+                <a:solidFill>
+                  <a:srgbClr val="003B4F"/>
+                </a:solidFill>
+                <a:latin typeface="Courier"/>
+              </a:rPr>
+              <a:t>  </a:t>
+            </a:r>
+            <a:r>
+              <a:rPr>
+                <a:solidFill>
+                  <a:srgbClr val="4758AB"/>
+                </a:solidFill>
+                <a:latin typeface="Courier"/>
+              </a:rPr>
+              <a:t>geom_density</a:t>
+            </a:r>
+            <a:r>
+              <a:rPr>
+                <a:solidFill>
+                  <a:srgbClr val="003B4F"/>
+                </a:solidFill>
+                <a:latin typeface="Courier"/>
+              </a:rPr>
+              <a:t>(</a:t>
+            </a:r>
+            <a:r>
+              <a:rPr>
+                <a:solidFill>
+                  <a:srgbClr val="657422"/>
+                </a:solidFill>
+                <a:latin typeface="Courier"/>
+              </a:rPr>
+              <a:t>alpha =</a:t>
+            </a:r>
+            <a:r>
+              <a:rPr>
+                <a:solidFill>
+                  <a:srgbClr val="003B4F"/>
+                </a:solidFill>
+                <a:latin typeface="Courier"/>
+              </a:rPr>
+              <a:t> </a:t>
+            </a:r>
+            <a:r>
+              <a:rPr>
+                <a:solidFill>
+                  <a:srgbClr val="AD0000"/>
+                </a:solidFill>
+                <a:latin typeface="Courier"/>
+              </a:rPr>
+              <a:t>0.5</a:t>
+            </a:r>
+            <a:r>
+              <a:rPr>
+                <a:solidFill>
+                  <a:srgbClr val="003B4F"/>
+                </a:solidFill>
+                <a:latin typeface="Courier"/>
+              </a:rPr>
+              <a:t>) </a:t>
+            </a:r>
+            <a:r>
+              <a:rPr>
+                <a:solidFill>
+                  <a:srgbClr val="5E5E5E"/>
+                </a:solidFill>
+                <a:latin typeface="Courier"/>
+              </a:rPr>
+              <a:t>+</a:t>
+            </a:r>
+            <a:br/>
+            <a:r>
+              <a:rPr>
+                <a:solidFill>
+                  <a:srgbClr val="003B4F"/>
+                </a:solidFill>
+                <a:latin typeface="Courier"/>
+              </a:rPr>
+              <a:t>  </a:t>
+            </a:r>
+            <a:r>
+              <a:rPr>
+                <a:solidFill>
+                  <a:srgbClr val="4758AB"/>
+                </a:solidFill>
+                <a:latin typeface="Courier"/>
+              </a:rPr>
+              <a:t>labs</a:t>
+            </a:r>
+            <a:r>
+              <a:rPr>
+                <a:solidFill>
+                  <a:srgbClr val="003B4F"/>
+                </a:solidFill>
+                <a:latin typeface="Courier"/>
+              </a:rPr>
+              <a:t>(</a:t>
+            </a:r>
+            <a:r>
+              <a:rPr>
+                <a:solidFill>
+                  <a:srgbClr val="657422"/>
+                </a:solidFill>
+                <a:latin typeface="Courier"/>
+              </a:rPr>
+              <a:t>x =</a:t>
+            </a:r>
+            <a:r>
+              <a:rPr>
+                <a:solidFill>
+                  <a:srgbClr val="003B4F"/>
+                </a:solidFill>
+                <a:latin typeface="Courier"/>
+              </a:rPr>
+              <a:t> </a:t>
+            </a:r>
+            <a:r>
+              <a:rPr>
+                <a:solidFill>
+                  <a:srgbClr val="20794D"/>
+                </a:solidFill>
+                <a:latin typeface="Courier"/>
+              </a:rPr>
+              <a:t>"Needle length (mm)"</a:t>
+            </a:r>
+            <a:r>
+              <a:rPr>
+                <a:solidFill>
+                  <a:srgbClr val="003B4F"/>
+                </a:solidFill>
+                <a:latin typeface="Courier"/>
+              </a:rPr>
+              <a:t>, </a:t>
+            </a:r>
+            <a:r>
+              <a:rPr>
+                <a:solidFill>
+                  <a:srgbClr val="657422"/>
+                </a:solidFill>
+                <a:latin typeface="Courier"/>
+              </a:rPr>
+              <a:t>y =</a:t>
+            </a:r>
+            <a:r>
+              <a:rPr>
+                <a:solidFill>
+                  <a:srgbClr val="003B4F"/>
+                </a:solidFill>
+                <a:latin typeface="Courier"/>
+              </a:rPr>
+              <a:t> </a:t>
+            </a:r>
+            <a:r>
+              <a:rPr>
+                <a:solidFill>
+                  <a:srgbClr val="20794D"/>
+                </a:solidFill>
+                <a:latin typeface="Courier"/>
+              </a:rPr>
+              <a:t>"Density"</a:t>
+            </a:r>
+            <a:r>
+              <a:rPr>
+                <a:solidFill>
+                  <a:srgbClr val="003B4F"/>
+                </a:solidFill>
+                <a:latin typeface="Courier"/>
+              </a:rPr>
+              <a:t>, </a:t>
+            </a:r>
+            <a:r>
+              <a:rPr>
+                <a:solidFill>
+                  <a:srgbClr val="657422"/>
+                </a:solidFill>
+                <a:latin typeface="Courier"/>
+              </a:rPr>
+              <a:t>fill =</a:t>
+            </a:r>
+            <a:r>
+              <a:rPr>
+                <a:solidFill>
+                  <a:srgbClr val="003B4F"/>
+                </a:solidFill>
+                <a:latin typeface="Courier"/>
+              </a:rPr>
+              <a:t> </a:t>
+            </a:r>
+            <a:r>
+              <a:rPr>
+                <a:solidFill>
+                  <a:srgbClr val="20794D"/>
+                </a:solidFill>
+                <a:latin typeface="Courier"/>
+              </a:rPr>
+              <a:t>"Side"</a:t>
+            </a:r>
+            <a:r>
+              <a:rPr>
+                <a:solidFill>
+                  <a:srgbClr val="003B4F"/>
+                </a:solidFill>
+                <a:latin typeface="Courier"/>
+              </a:rPr>
+              <a:t>) </a:t>
+            </a:r>
+            <a:r>
+              <a:rPr>
+                <a:solidFill>
+                  <a:srgbClr val="5E5E5E"/>
+                </a:solidFill>
+                <a:latin typeface="Courier"/>
+              </a:rPr>
+              <a:t>+</a:t>
+            </a:r>
+            <a:br/>
+            <a:r>
+              <a:rPr>
+                <a:solidFill>
+                  <a:srgbClr val="003B4F"/>
+                </a:solidFill>
+                <a:latin typeface="Courier"/>
+              </a:rPr>
+              <a:t>  </a:t>
+            </a:r>
+            <a:r>
+              <a:rPr>
+                <a:solidFill>
+                  <a:srgbClr val="4758AB"/>
+                </a:solidFill>
+                <a:latin typeface="Courier"/>
+              </a:rPr>
+              <a:t>theme_minimal</a:t>
+            </a:r>
+            <a:r>
+              <a:rPr>
+                <a:solidFill>
+                  <a:srgbClr val="003B4F"/>
+                </a:solidFill>
+                <a:latin typeface="Courier"/>
+              </a:rPr>
+              <a:t>()</a:t>
+            </a:r>
+          </a:p>
+          <a:p>
+            <a:pPr lvl="0" indent="0" marL="0">
+              <a:buNone/>
+            </a:pPr>
+            <a:r>
+              <a:rPr/>
+              <a:t>✏️ </a:t>
+            </a:r>
+            <a:r>
+              <a:rPr b="1"/>
+              <a:t>Your turn:</a:t>
+            </a:r>
+            <a:r>
+              <a:rPr/>
+              <a:t> Do the lee and windward density curves look like they overlap a lot, or are they clearly separated? </a:t>
             </a:r>
             <a:r>
               <a:rPr>
                 <a:latin typeface="Courier"/>
               </a:rPr>
               <a:t>________________________</a:t>
+            </a:r>
+          </a:p>
+          <a:p>
+            <a:pPr lvl="0" indent="0" marL="1270000">
+              <a:buNone/>
+            </a:pPr>
+            <a:r>
+              <a:rPr sz="2000" b="1"/>
+              <a:t>Tip</a:t>
+            </a:r>
+          </a:p>
+          <a:p>
+            <a:pPr lvl="0" indent="0" marL="1270000">
+              <a:buNone/>
+            </a:pPr>
+            <a:r>
+              <a:rPr sz="2000" b="1"/>
+              <a:t>🚀 If you finish early:</a:t>
+            </a:r>
+            <a:r>
+              <a:rPr sz="2000"/>
+              <a:t> Build a faceted histogram — </a:t>
+            </a:r>
+            <a:r>
+              <a:rPr sz="2000">
+                <a:latin typeface="Courier"/>
+              </a:rPr>
+              <a:t>geom_histogram()</a:t>
+            </a:r>
+            <a:r>
+              <a:rPr sz="2000"/>
+              <a:t> + </a:t>
+            </a:r>
+            <a:r>
+              <a:rPr sz="2000">
+                <a:latin typeface="Courier"/>
+              </a:rPr>
+              <a:t>facet_wrap(~n_s, ncol = 1)</a:t>
+            </a:r>
+            <a:r>
+              <a:rPr sz="2000"/>
+              <a:t> — and compare it to the overlaid density plot above. Which is easier to read?</a:t>
             </a:r>
           </a:p>
         </p:txBody>
@@ -7433,7 +10147,7 @@
             </a:pPr>
             <a:r>
               <a:rPr/>
-              <a:t>Part 7 · Pick a theme</a:t>
+              <a:t>Part 5 · Mean ± SE, plotted directly</a:t>
             </a:r>
           </a:p>
         </p:txBody>
@@ -7458,7 +10172,7 @@
             </a:pPr>
             <a:r>
               <a:rPr b="1"/>
-              <a:t>▶ Run this — try each one:</a:t>
+              <a:t>▶ Run this:</a:t>
             </a:r>
           </a:p>
           <a:p>
@@ -7472,7 +10186,97 @@
                 </a:solidFill>
                 <a:latin typeface="Courier"/>
               </a:rPr>
-              <a:t>pine_jitter_plot </a:t>
+              <a:t>pine_mean_se_plot &lt;- </a:t>
+            </a:r>
+            <a:r>
+              <a:rPr>
+                <a:solidFill>
+                  <a:srgbClr val="4758AB"/>
+                </a:solidFill>
+                <a:latin typeface="Courier"/>
+              </a:rPr>
+              <a:t>ggplot</a:t>
+            </a:r>
+            <a:r>
+              <a:rPr>
+                <a:solidFill>
+                  <a:srgbClr val="003B4F"/>
+                </a:solidFill>
+                <a:latin typeface="Courier"/>
+              </a:rPr>
+              <a:t>(pine_df, </a:t>
+            </a:r>
+            <a:r>
+              <a:rPr>
+                <a:solidFill>
+                  <a:srgbClr val="4758AB"/>
+                </a:solidFill>
+                <a:latin typeface="Courier"/>
+              </a:rPr>
+              <a:t>aes</a:t>
+            </a:r>
+            <a:r>
+              <a:rPr>
+                <a:solidFill>
+                  <a:srgbClr val="003B4F"/>
+                </a:solidFill>
+                <a:latin typeface="Courier"/>
+              </a:rPr>
+              <a:t>(</a:t>
+            </a:r>
+            <a:r>
+              <a:rPr>
+                <a:solidFill>
+                  <a:srgbClr val="657422"/>
+                </a:solidFill>
+                <a:latin typeface="Courier"/>
+              </a:rPr>
+              <a:t>x =</a:t>
+            </a:r>
+            <a:r>
+              <a:rPr>
+                <a:solidFill>
+                  <a:srgbClr val="003B4F"/>
+                </a:solidFill>
+                <a:latin typeface="Courier"/>
+              </a:rPr>
+              <a:t> n_s, </a:t>
+            </a:r>
+            <a:r>
+              <a:rPr>
+                <a:solidFill>
+                  <a:srgbClr val="657422"/>
+                </a:solidFill>
+                <a:latin typeface="Courier"/>
+              </a:rPr>
+              <a:t>y =</a:t>
+            </a:r>
+            <a:r>
+              <a:rPr>
+                <a:solidFill>
+                  <a:srgbClr val="003B4F"/>
+                </a:solidFill>
+                <a:latin typeface="Courier"/>
+              </a:rPr>
+              <a:t> length_mm, </a:t>
+            </a:r>
+            <a:r>
+              <a:rPr>
+                <a:solidFill>
+                  <a:srgbClr val="657422"/>
+                </a:solidFill>
+                <a:latin typeface="Courier"/>
+              </a:rPr>
+              <a:t>color =</a:t>
+            </a:r>
+            <a:r>
+              <a:rPr>
+                <a:solidFill>
+                  <a:srgbClr val="003B4F"/>
+                </a:solidFill>
+                <a:latin typeface="Courier"/>
+              </a:rPr>
+              <a:t> n_s)) </a:t>
             </a:r>
             <a:r>
               <a:rPr>
@@ -7483,6 +10287,53 @@
               </a:rPr>
               <a:t>+</a:t>
             </a:r>
+            <a:br/>
+            <a:r>
+              <a:rPr>
+                <a:solidFill>
+                  <a:srgbClr val="003B4F"/>
+                </a:solidFill>
+                <a:latin typeface="Courier"/>
+              </a:rPr>
+              <a:t>  </a:t>
+            </a:r>
+            <a:r>
+              <a:rPr>
+                <a:solidFill>
+                  <a:srgbClr val="4758AB"/>
+                </a:solidFill>
+                <a:latin typeface="Courier"/>
+              </a:rPr>
+              <a:t>geom_point</a:t>
+            </a:r>
+            <a:r>
+              <a:rPr>
+                <a:solidFill>
+                  <a:srgbClr val="003B4F"/>
+                </a:solidFill>
+                <a:latin typeface="Courier"/>
+              </a:rPr>
+              <a:t>(</a:t>
+            </a:r>
+            <a:br/>
+            <a:r>
+              <a:rPr>
+                <a:solidFill>
+                  <a:srgbClr val="003B4F"/>
+                </a:solidFill>
+                <a:latin typeface="Courier"/>
+              </a:rPr>
+              <a:t>    </a:t>
+            </a:r>
+            <a:r>
+              <a:rPr>
+                <a:solidFill>
+                  <a:srgbClr val="657422"/>
+                </a:solidFill>
+                <a:latin typeface="Courier"/>
+              </a:rPr>
+              <a:t>position =</a:t>
+            </a:r>
             <a:r>
               <a:rPr>
                 <a:solidFill>
@@ -7499,16 +10350,88 @@
                 </a:solidFill>
                 <a:latin typeface="Courier"/>
               </a:rPr>
-              <a:t>theme_bw</a:t>
-            </a:r>
-            <a:r>
-              <a:rPr>
-                <a:solidFill>
-                  <a:srgbClr val="003B4F"/>
-                </a:solidFill>
-                <a:latin typeface="Courier"/>
-              </a:rPr>
-              <a:t>()</a:t>
+              <a:t>position_jitter</a:t>
+            </a:r>
+            <a:r>
+              <a:rPr>
+                <a:solidFill>
+                  <a:srgbClr val="003B4F"/>
+                </a:solidFill>
+                <a:latin typeface="Courier"/>
+              </a:rPr>
+              <a:t>(</a:t>
+            </a:r>
+            <a:r>
+              <a:rPr>
+                <a:solidFill>
+                  <a:srgbClr val="657422"/>
+                </a:solidFill>
+                <a:latin typeface="Courier"/>
+              </a:rPr>
+              <a:t>width =</a:t>
+            </a:r>
+            <a:r>
+              <a:rPr>
+                <a:solidFill>
+                  <a:srgbClr val="003B4F"/>
+                </a:solidFill>
+                <a:latin typeface="Courier"/>
+              </a:rPr>
+              <a:t> </a:t>
+            </a:r>
+            <a:r>
+              <a:rPr>
+                <a:solidFill>
+                  <a:srgbClr val="AD0000"/>
+                </a:solidFill>
+                <a:latin typeface="Courier"/>
+              </a:rPr>
+              <a:t>0.15</a:t>
+            </a:r>
+            <a:r>
+              <a:rPr>
+                <a:solidFill>
+                  <a:srgbClr val="003B4F"/>
+                </a:solidFill>
+                <a:latin typeface="Courier"/>
+              </a:rPr>
+              <a:t>, </a:t>
+            </a:r>
+            <a:r>
+              <a:rPr>
+                <a:solidFill>
+                  <a:srgbClr val="657422"/>
+                </a:solidFill>
+                <a:latin typeface="Courier"/>
+              </a:rPr>
+              <a:t>seed =</a:t>
+            </a:r>
+            <a:r>
+              <a:rPr>
+                <a:solidFill>
+                  <a:srgbClr val="003B4F"/>
+                </a:solidFill>
+                <a:latin typeface="Courier"/>
+              </a:rPr>
+              <a:t> </a:t>
+            </a:r>
+            <a:r>
+              <a:rPr>
+                <a:solidFill>
+                  <a:srgbClr val="AD0000"/>
+                </a:solidFill>
+                <a:latin typeface="Courier"/>
+              </a:rPr>
+              <a:t>42</a:t>
+            </a:r>
+            <a:r>
+              <a:rPr>
+                <a:solidFill>
+                  <a:srgbClr val="003B4F"/>
+                </a:solidFill>
+                <a:latin typeface="Courier"/>
+              </a:rPr>
+              <a:t>),</a:t>
             </a:r>
             <a:br/>
             <a:r>
@@ -7518,7 +10441,80 @@
                 </a:solidFill>
                 <a:latin typeface="Courier"/>
               </a:rPr>
-              <a:t>pine_jitter_plot </a:t>
+              <a:t>    </a:t>
+            </a:r>
+            <a:r>
+              <a:rPr>
+                <a:solidFill>
+                  <a:srgbClr val="657422"/>
+                </a:solidFill>
+                <a:latin typeface="Courier"/>
+              </a:rPr>
+              <a:t>alpha =</a:t>
+            </a:r>
+            <a:r>
+              <a:rPr>
+                <a:solidFill>
+                  <a:srgbClr val="003B4F"/>
+                </a:solidFill>
+                <a:latin typeface="Courier"/>
+              </a:rPr>
+              <a:t> </a:t>
+            </a:r>
+            <a:r>
+              <a:rPr>
+                <a:solidFill>
+                  <a:srgbClr val="AD0000"/>
+                </a:solidFill>
+                <a:latin typeface="Courier"/>
+              </a:rPr>
+              <a:t>0.3</a:t>
+            </a:r>
+            <a:r>
+              <a:rPr>
+                <a:solidFill>
+                  <a:srgbClr val="003B4F"/>
+                </a:solidFill>
+                <a:latin typeface="Courier"/>
+              </a:rPr>
+              <a:t>, </a:t>
+            </a:r>
+            <a:r>
+              <a:rPr>
+                <a:solidFill>
+                  <a:srgbClr val="657422"/>
+                </a:solidFill>
+                <a:latin typeface="Courier"/>
+              </a:rPr>
+              <a:t>size =</a:t>
+            </a:r>
+            <a:r>
+              <a:rPr>
+                <a:solidFill>
+                  <a:srgbClr val="003B4F"/>
+                </a:solidFill>
+                <a:latin typeface="Courier"/>
+              </a:rPr>
+              <a:t> </a:t>
+            </a:r>
+            <a:r>
+              <a:rPr>
+                <a:solidFill>
+                  <a:srgbClr val="AD0000"/>
+                </a:solidFill>
+                <a:latin typeface="Courier"/>
+              </a:rPr>
+              <a:t>2</a:t>
+            </a:r>
+            <a:br/>
+            <a:r>
+              <a:rPr>
+                <a:solidFill>
+                  <a:srgbClr val="003B4F"/>
+                </a:solidFill>
+                <a:latin typeface="Courier"/>
+              </a:rPr>
+              <a:t>  ) </a:t>
             </a:r>
             <a:r>
               <a:rPr>
@@ -7529,6 +10525,61 @@
               </a:rPr>
               <a:t>+</a:t>
             </a:r>
+            <a:br/>
+            <a:r>
+              <a:rPr>
+                <a:solidFill>
+                  <a:srgbClr val="003B4F"/>
+                </a:solidFill>
+                <a:latin typeface="Courier"/>
+              </a:rPr>
+              <a:t>  </a:t>
+            </a:r>
+            <a:r>
+              <a:rPr>
+                <a:solidFill>
+                  <a:srgbClr val="4758AB"/>
+                </a:solidFill>
+                <a:latin typeface="Courier"/>
+              </a:rPr>
+              <a:t>stat_summary</a:t>
+            </a:r>
+            <a:r>
+              <a:rPr>
+                <a:solidFill>
+                  <a:srgbClr val="003B4F"/>
+                </a:solidFill>
+                <a:latin typeface="Courier"/>
+              </a:rPr>
+              <a:t>(</a:t>
+            </a:r>
+            <a:r>
+              <a:rPr>
+                <a:solidFill>
+                  <a:srgbClr val="657422"/>
+                </a:solidFill>
+                <a:latin typeface="Courier"/>
+              </a:rPr>
+              <a:t>fun =</a:t>
+            </a:r>
+            <a:r>
+              <a:rPr>
+                <a:solidFill>
+                  <a:srgbClr val="003B4F"/>
+                </a:solidFill>
+                <a:latin typeface="Courier"/>
+              </a:rPr>
+              <a:t> mean, </a:t>
+            </a:r>
+            <a:r>
+              <a:rPr>
+                <a:solidFill>
+                  <a:srgbClr val="657422"/>
+                </a:solidFill>
+                <a:latin typeface="Courier"/>
+              </a:rPr>
+              <a:t>geom =</a:t>
+            </a:r>
             <a:r>
               <a:rPr>
                 <a:solidFill>
@@ -7541,20 +10592,192 @@
             <a:r>
               <a:rPr>
                 <a:solidFill>
+                  <a:srgbClr val="20794D"/>
+                </a:solidFill>
+                <a:latin typeface="Courier"/>
+              </a:rPr>
+              <a:t>"point"</a:t>
+            </a:r>
+            <a:r>
+              <a:rPr>
+                <a:solidFill>
+                  <a:srgbClr val="003B4F"/>
+                </a:solidFill>
+                <a:latin typeface="Courier"/>
+              </a:rPr>
+              <a:t>, </a:t>
+            </a:r>
+            <a:r>
+              <a:rPr>
+                <a:solidFill>
+                  <a:srgbClr val="657422"/>
+                </a:solidFill>
+                <a:latin typeface="Courier"/>
+              </a:rPr>
+              <a:t>size =</a:t>
+            </a:r>
+            <a:r>
+              <a:rPr>
+                <a:solidFill>
+                  <a:srgbClr val="003B4F"/>
+                </a:solidFill>
+                <a:latin typeface="Courier"/>
+              </a:rPr>
+              <a:t> </a:t>
+            </a:r>
+            <a:r>
+              <a:rPr>
+                <a:solidFill>
+                  <a:srgbClr val="AD0000"/>
+                </a:solidFill>
+                <a:latin typeface="Courier"/>
+              </a:rPr>
+              <a:t>4</a:t>
+            </a:r>
+            <a:r>
+              <a:rPr>
+                <a:solidFill>
+                  <a:srgbClr val="003B4F"/>
+                </a:solidFill>
+                <a:latin typeface="Courier"/>
+              </a:rPr>
+              <a:t>) </a:t>
+            </a:r>
+            <a:r>
+              <a:rPr>
+                <a:solidFill>
+                  <a:srgbClr val="5E5E5E"/>
+                </a:solidFill>
+                <a:latin typeface="Courier"/>
+              </a:rPr>
+              <a:t>+</a:t>
+            </a:r>
+            <a:br/>
+            <a:r>
+              <a:rPr>
+                <a:solidFill>
+                  <a:srgbClr val="003B4F"/>
+                </a:solidFill>
+                <a:latin typeface="Courier"/>
+              </a:rPr>
+              <a:t>  </a:t>
+            </a:r>
+            <a:r>
+              <a:rPr>
+                <a:solidFill>
                   <a:srgbClr val="4758AB"/>
                 </a:solidFill>
                 <a:latin typeface="Courier"/>
               </a:rPr>
-              <a:t>theme_classic</a:t>
-            </a:r>
-            <a:r>
-              <a:rPr>
-                <a:solidFill>
-                  <a:srgbClr val="003B4F"/>
-                </a:solidFill>
-                <a:latin typeface="Courier"/>
-              </a:rPr>
-              <a:t>()</a:t>
+              <a:t>stat_summary</a:t>
+            </a:r>
+            <a:r>
+              <a:rPr>
+                <a:solidFill>
+                  <a:srgbClr val="003B4F"/>
+                </a:solidFill>
+                <a:latin typeface="Courier"/>
+              </a:rPr>
+              <a:t>(</a:t>
+            </a:r>
+            <a:r>
+              <a:rPr>
+                <a:solidFill>
+                  <a:srgbClr val="657422"/>
+                </a:solidFill>
+                <a:latin typeface="Courier"/>
+              </a:rPr>
+              <a:t>fun.data =</a:t>
+            </a:r>
+            <a:r>
+              <a:rPr>
+                <a:solidFill>
+                  <a:srgbClr val="003B4F"/>
+                </a:solidFill>
+                <a:latin typeface="Courier"/>
+              </a:rPr>
+              <a:t> mean_se, </a:t>
+            </a:r>
+            <a:r>
+              <a:rPr>
+                <a:solidFill>
+                  <a:srgbClr val="657422"/>
+                </a:solidFill>
+                <a:latin typeface="Courier"/>
+              </a:rPr>
+              <a:t>geom =</a:t>
+            </a:r>
+            <a:r>
+              <a:rPr>
+                <a:solidFill>
+                  <a:srgbClr val="003B4F"/>
+                </a:solidFill>
+                <a:latin typeface="Courier"/>
+              </a:rPr>
+              <a:t> </a:t>
+            </a:r>
+            <a:r>
+              <a:rPr>
+                <a:solidFill>
+                  <a:srgbClr val="20794D"/>
+                </a:solidFill>
+                <a:latin typeface="Courier"/>
+              </a:rPr>
+              <a:t>"errorbar"</a:t>
+            </a:r>
+            <a:r>
+              <a:rPr>
+                <a:solidFill>
+                  <a:srgbClr val="003B4F"/>
+                </a:solidFill>
+                <a:latin typeface="Courier"/>
+              </a:rPr>
+              <a:t>, </a:t>
+            </a:r>
+            <a:r>
+              <a:rPr>
+                <a:solidFill>
+                  <a:srgbClr val="657422"/>
+                </a:solidFill>
+                <a:latin typeface="Courier"/>
+              </a:rPr>
+              <a:t>width =</a:t>
+            </a:r>
+            <a:r>
+              <a:rPr>
+                <a:solidFill>
+                  <a:srgbClr val="003B4F"/>
+                </a:solidFill>
+                <a:latin typeface="Courier"/>
+              </a:rPr>
+              <a:t> </a:t>
+            </a:r>
+            <a:r>
+              <a:rPr>
+                <a:solidFill>
+                  <a:srgbClr val="AD0000"/>
+                </a:solidFill>
+                <a:latin typeface="Courier"/>
+              </a:rPr>
+              <a:t>0.15</a:t>
+            </a:r>
+            <a:r>
+              <a:rPr>
+                <a:solidFill>
+                  <a:srgbClr val="003B4F"/>
+                </a:solidFill>
+                <a:latin typeface="Courier"/>
+              </a:rPr>
+              <a:t>) </a:t>
+            </a:r>
+            <a:r>
+              <a:rPr>
+                <a:solidFill>
+                  <a:srgbClr val="5E5E5E"/>
+                </a:solidFill>
+                <a:latin typeface="Courier"/>
+              </a:rPr>
+              <a:t>+</a:t>
             </a:r>
             <a:br/>
             <a:r>
@@ -7564,7 +10787,97 @@
                 </a:solidFill>
                 <a:latin typeface="Courier"/>
               </a:rPr>
-              <a:t>pine_jitter_plot </a:t>
+              <a:t>  </a:t>
+            </a:r>
+            <a:r>
+              <a:rPr>
+                <a:solidFill>
+                  <a:srgbClr val="4758AB"/>
+                </a:solidFill>
+                <a:latin typeface="Courier"/>
+              </a:rPr>
+              <a:t>labs</a:t>
+            </a:r>
+            <a:r>
+              <a:rPr>
+                <a:solidFill>
+                  <a:srgbClr val="003B4F"/>
+                </a:solidFill>
+                <a:latin typeface="Courier"/>
+              </a:rPr>
+              <a:t>(</a:t>
+            </a:r>
+            <a:r>
+              <a:rPr>
+                <a:solidFill>
+                  <a:srgbClr val="657422"/>
+                </a:solidFill>
+                <a:latin typeface="Courier"/>
+              </a:rPr>
+              <a:t>x =</a:t>
+            </a:r>
+            <a:r>
+              <a:rPr>
+                <a:solidFill>
+                  <a:srgbClr val="003B4F"/>
+                </a:solidFill>
+                <a:latin typeface="Courier"/>
+              </a:rPr>
+              <a:t> </a:t>
+            </a:r>
+            <a:r>
+              <a:rPr>
+                <a:solidFill>
+                  <a:srgbClr val="20794D"/>
+                </a:solidFill>
+                <a:latin typeface="Courier"/>
+              </a:rPr>
+              <a:t>"Side of tree"</a:t>
+            </a:r>
+            <a:r>
+              <a:rPr>
+                <a:solidFill>
+                  <a:srgbClr val="003B4F"/>
+                </a:solidFill>
+                <a:latin typeface="Courier"/>
+              </a:rPr>
+              <a:t>, </a:t>
+            </a:r>
+            <a:r>
+              <a:rPr>
+                <a:solidFill>
+                  <a:srgbClr val="657422"/>
+                </a:solidFill>
+                <a:latin typeface="Courier"/>
+              </a:rPr>
+              <a:t>y =</a:t>
+            </a:r>
+            <a:r>
+              <a:rPr>
+                <a:solidFill>
+                  <a:srgbClr val="003B4F"/>
+                </a:solidFill>
+                <a:latin typeface="Courier"/>
+              </a:rPr>
+              <a:t> </a:t>
+            </a:r>
+            <a:r>
+              <a:rPr>
+                <a:solidFill>
+                  <a:srgbClr val="20794D"/>
+                </a:solidFill>
+                <a:latin typeface="Courier"/>
+              </a:rPr>
+              <a:t>"Needle length (mm)"</a:t>
+            </a:r>
+            <a:r>
+              <a:rPr>
+                <a:solidFill>
+                  <a:srgbClr val="003B4F"/>
+                </a:solidFill>
+                <a:latin typeface="Courier"/>
+              </a:rPr>
+              <a:t>) </a:t>
             </a:r>
             <a:r>
               <a:rPr>
@@ -7575,6 +10888,80 @@
               </a:rPr>
               <a:t>+</a:t>
             </a:r>
+            <a:br/>
+            <a:r>
+              <a:rPr>
+                <a:solidFill>
+                  <a:srgbClr val="003B4F"/>
+                </a:solidFill>
+                <a:latin typeface="Courier"/>
+              </a:rPr>
+              <a:t>  </a:t>
+            </a:r>
+            <a:r>
+              <a:rPr>
+                <a:solidFill>
+                  <a:srgbClr val="4758AB"/>
+                </a:solidFill>
+                <a:latin typeface="Courier"/>
+              </a:rPr>
+              <a:t>theme_minimal</a:t>
+            </a:r>
+            <a:r>
+              <a:rPr>
+                <a:solidFill>
+                  <a:srgbClr val="003B4F"/>
+                </a:solidFill>
+                <a:latin typeface="Courier"/>
+              </a:rPr>
+              <a:t>() </a:t>
+            </a:r>
+            <a:r>
+              <a:rPr>
+                <a:solidFill>
+                  <a:srgbClr val="5E5E5E"/>
+                </a:solidFill>
+                <a:latin typeface="Courier"/>
+              </a:rPr>
+              <a:t>+</a:t>
+            </a:r>
+            <a:br/>
+            <a:r>
+              <a:rPr>
+                <a:solidFill>
+                  <a:srgbClr val="003B4F"/>
+                </a:solidFill>
+                <a:latin typeface="Courier"/>
+              </a:rPr>
+              <a:t>  </a:t>
+            </a:r>
+            <a:r>
+              <a:rPr>
+                <a:solidFill>
+                  <a:srgbClr val="4758AB"/>
+                </a:solidFill>
+                <a:latin typeface="Courier"/>
+              </a:rPr>
+              <a:t>theme</a:t>
+            </a:r>
+            <a:r>
+              <a:rPr>
+                <a:solidFill>
+                  <a:srgbClr val="003B4F"/>
+                </a:solidFill>
+                <a:latin typeface="Courier"/>
+              </a:rPr>
+              <a:t>(</a:t>
+            </a:r>
+            <a:r>
+              <a:rPr>
+                <a:solidFill>
+                  <a:srgbClr val="657422"/>
+                </a:solidFill>
+                <a:latin typeface="Courier"/>
+              </a:rPr>
+              <a:t>legend.position =</a:t>
+            </a:r>
             <a:r>
               <a:rPr>
                 <a:solidFill>
@@ -7587,20 +10974,31 @@
             <a:r>
               <a:rPr>
                 <a:solidFill>
-                  <a:srgbClr val="4758AB"/>
-                </a:solidFill>
-                <a:latin typeface="Courier"/>
-              </a:rPr>
-              <a:t>theme_minimal</a:t>
-            </a:r>
-            <a:r>
-              <a:rPr>
-                <a:solidFill>
-                  <a:srgbClr val="003B4F"/>
-                </a:solidFill>
-                <a:latin typeface="Courier"/>
-              </a:rPr>
-              <a:t>()</a:t>
+                  <a:srgbClr val="20794D"/>
+                </a:solidFill>
+                <a:latin typeface="Courier"/>
+              </a:rPr>
+              <a:t>"none"</a:t>
+            </a:r>
+            <a:r>
+              <a:rPr>
+                <a:solidFill>
+                  <a:srgbClr val="003B4F"/>
+                </a:solidFill>
+                <a:latin typeface="Courier"/>
+              </a:rPr>
+              <a:t>)</a:t>
+            </a:r>
+            <a:br/>
+            <a:br/>
+            <a:r>
+              <a:rPr>
+                <a:solidFill>
+                  <a:srgbClr val="003B4F"/>
+                </a:solidFill>
+                <a:latin typeface="Courier"/>
+              </a:rPr>
+              <a:t>pine_mean_se_plot</a:t>
             </a:r>
           </a:p>
           <a:p>
@@ -7617,13 +11015,29 @@
             </a:r>
             <a:r>
               <a:rPr/>
-              <a:t> Which theme do you like best for this kind of biological comparison? Why? </a:t>
-            </a:r>
-            <a:r>
-              <a:rPr>
-                <a:latin typeface="Courier"/>
-              </a:rPr>
-              <a:t>________________________</a:t>
+              <a:t> Which two </a:t>
+            </a:r>
+            <a:r>
+              <a:rPr>
+                <a:latin typeface="Courier"/>
+              </a:rPr>
+              <a:t>stat_summary()</a:t>
+            </a:r>
+            <a:r>
+              <a:rPr/>
+              <a:t> calls compute the mean point and the SE error bars? Copy them below and label which is which.</a:t>
+            </a:r>
+          </a:p>
+          <a:p>
+            <a:pPr lvl="0" indent="0">
+              <a:buNone/>
+            </a:pPr>
+            <a:r>
+              <a:rPr>
+                <a:latin typeface="Courier"/>
+              </a:rPr>
+              <a:t>Mean point:   ________________________
+SE bars:      ________________________</a:t>
             </a:r>
           </a:p>
         </p:txBody>

--- a/docs/content/graphing_effectively/graphing_effectively_activity.pptx
+++ b/docs/content/graphing_effectively/graphing_effectively_activity.pptx
@@ -3307,7 +3307,7 @@
             </a:pPr>
             <a:r>
               <a:rPr/>
-              <a:t>Graphing Effectively</a:t>
+              <a:t>Activity: Graphing Effectively</a:t>
             </a:r>
           </a:p>
         </p:txBody>
@@ -6629,7 +6629,7 @@
             </a:pPr>
             <a:r>
               <a:rPr/>
-              <a:t>Worksheet 4: Graphing Effectively</a:t>
+              <a:t>Worksheet: Graphing Effectively</a:t>
             </a:r>
           </a:p>
         </p:txBody>

--- a/docs/content/graphing_effectively/graphing_effectively_activity.pptx
+++ b/docs/content/graphing_effectively/graphing_effectively_activity.pptx
@@ -3517,7 +3517,7 @@
             </a:r>
             <a:r>
               <a:rPr/>
-              <a:t> Looking at the four panels, does every field team show the same lee-vs-windward pattern, or does one team look different? </a:t>
+              <a:t> Looking at the four panels, does every field team show the same shady-vs-sunny pattern, or does one team look different? </a:t>
             </a:r>
             <a:r>
               <a:rPr>
@@ -4868,7 +4868,7 @@
                 </a:solidFill>
                 <a:latin typeface="Courier"/>
               </a:rPr>
-              <a:t>"Lee (sheltered)"</a:t>
+              <a:t>"Shady (sheltered)"</a:t>
             </a:r>
             <a:r>
               <a:rPr>
@@ -4904,7 +4904,7 @@
                 </a:solidFill>
                 <a:latin typeface="Courier"/>
               </a:rPr>
-              <a:t>"Windward"</a:t>
+              <a:t>"Sunny"</a:t>
             </a:r>
             <a:r>
               <a:rPr>
@@ -5689,7 +5689,7 @@
                 </a:solidFill>
                 <a:latin typeface="Courier"/>
               </a:rPr>
-              <a:t>"Lee (sheltered)"</a:t>
+              <a:t>"Shady (sheltered)"</a:t>
             </a:r>
             <a:r>
               <a:rPr>
@@ -5725,7 +5725,7 @@
                 </a:solidFill>
                 <a:latin typeface="Courier"/>
               </a:rPr>
-              <a:t>"Windward"</a:t>
+              <a:t>"Sunny"</a:t>
             </a:r>
             <a:r>
               <a:rPr>
@@ -8204,7 +8204,7 @@
                 </a:solidFill>
                 <a:latin typeface="Courier"/>
               </a:rPr>
-              <a:t>"Side of tree (lee = n, windward = s)"</a:t>
+              <a:t>"Side of tree (shady = n, sunny = s)"</a:t>
             </a:r>
             <a:r>
               <a:rPr>
@@ -10047,7 +10047,7 @@
             </a:r>
             <a:r>
               <a:rPr/>
-              <a:t> Do the lee and windward density curves look like they overlap a lot, or are they clearly separated? </a:t>
+              <a:t> Do the shady and sunny density curves look like they overlap a lot, or are they clearly separated? </a:t>
             </a:r>
             <a:r>
               <a:rPr>

--- a/docs/content/graphing_effectively/graphing_effectively_activity.pptx
+++ b/docs/content/graphing_effectively/graphing_effectively_activity.pptx
@@ -9147,7 +9147,7 @@
               <a:rPr>
                 <a:latin typeface="Courier"/>
               </a:rPr>
-              <a:t>color = "steelblue"</a:t>
+              <a:t>color = "darkblue"</a:t>
             </a:r>
             <a:r>
               <a:rPr/>
@@ -9411,7 +9411,7 @@
                 </a:solidFill>
                 <a:latin typeface="Courier"/>
               </a:rPr>
-              <a:t>"steelblue"</a:t>
+              <a:t>"darkblue"</a:t>
             </a:r>
             <a:r>
               <a:rPr>

--- a/docs/content/graphing_effectively/graphing_effectively_activity.pptx
+++ b/docs/content/graphing_effectively/graphing_effectively_activity.pptx
@@ -3517,13 +3517,18 @@
             </a:r>
             <a:r>
               <a:rPr/>
-              <a:t> Looking at the four panels, does every field team show the same shady-vs-sunny pattern, or does one team look different? </a:t>
-            </a:r>
-            <a:r>
-              <a:rPr>
-                <a:latin typeface="Courier"/>
-              </a:rPr>
-              <a:t>________________________</a:t>
+              <a:t> Looking at the four panels, does every field team show the same shady-vs-sunny pattern, or does one team look different?</a:t>
+            </a:r>
+          </a:p>
+          <a:p>
+            <a:pPr lvl="0" indent="0" marL="0">
+              <a:buNone/>
+            </a:pPr>
+            <a:r>
+              <a:rPr>
+                <a:latin typeface="Courier"/>
+              </a:rPr>
+              <a:t>________________________________________________________________________________________</a:t>
             </a:r>
           </a:p>
         </p:txBody>
@@ -3759,13 +3764,18 @@
             </a:r>
             <a:r>
               <a:rPr/>
-              <a:t> Which theme do you like best for this kind of biological comparison? Why? </a:t>
-            </a:r>
-            <a:r>
-              <a:rPr>
-                <a:latin typeface="Courier"/>
-              </a:rPr>
-              <a:t>________________________</a:t>
+              <a:t> Which theme do you like best for this kind of biological comparison? Why?</a:t>
+            </a:r>
+          </a:p>
+          <a:p>
+            <a:pPr lvl="0" indent="0" marL="0">
+              <a:buNone/>
+            </a:pPr>
+            <a:r>
+              <a:rPr>
+                <a:latin typeface="Courier"/>
+              </a:rPr>
+              <a:t>______________________________________________________________________________</a:t>
             </a:r>
           </a:p>
         </p:txBody>
@@ -4162,13 +4172,15 @@
             </a:r>
             <a:r>
               <a:rPr/>
-              <a:t>? </a:t>
-            </a:r>
-            <a:r>
-              <a:rPr>
-                <a:latin typeface="Courier"/>
-              </a:rPr>
-              <a:t>________________________</a:t>
+              <a:t>?</a:t>
+            </a:r>
+            <a:br/>
+            <a:br/>
+            <a:r>
+              <a:rPr>
+                <a:latin typeface="Courier"/>
+              </a:rPr>
+              <a:t>_____________________________________________________________________________</a:t>
             </a:r>
           </a:p>
         </p:txBody>
@@ -5230,6 +5242,9 @@
               </a:rPr>
               <a:t># Write your code here:</a:t>
             </a:r>
+            <a:br/>
+            <a:br/>
+            <a:br/>
           </a:p>
           <a:p>
             <a:pPr lvl="0" indent="0" marL="0">
@@ -5306,7 +5321,9 @@
               <a:rPr>
                 <a:latin typeface="Courier"/>
               </a:rPr>
-              <a:t>________________________________________________________</a:t>
+              <a:t>
+________________________________________________________________________________
+________________________________________________________________________________</a:t>
             </a:r>
           </a:p>
           <a:p>
@@ -6045,13 +6062,16 @@
             </a:r>
             <a:r>
               <a:rPr/>
-              <a:t>? </a:t>
-            </a:r>
-            <a:r>
-              <a:rPr>
-                <a:latin typeface="Courier"/>
-              </a:rPr>
-              <a:t>________________________</a:t>
+              <a:t>?</a:t>
+            </a:r>
+            <a:br/>
+            <a:br/>
+            <a:br/>
+            <a:r>
+              <a:rPr>
+                <a:latin typeface="Courier"/>
+              </a:rPr>
+              <a:t>________________________________________________________________________________________</a:t>
             </a:r>
           </a:p>
         </p:txBody>
@@ -6312,13 +6332,18 @@
             </a:r>
             <a:r>
               <a:rPr/>
-              <a:t> — if not, the error was: </a:t>
-            </a:r>
-            <a:r>
-              <a:rPr>
-                <a:latin typeface="Courier"/>
-              </a:rPr>
-              <a:t>________________________</a:t>
+              <a:t> — if not, the error was:</a:t>
+            </a:r>
+          </a:p>
+          <a:p>
+            <a:pPr lvl="0" indent="0" marL="0">
+              <a:buNone/>
+            </a:pPr>
+            <a:r>
+              <a:rPr>
+                <a:latin typeface="Courier"/>
+              </a:rPr>
+              <a:t>_________________________________________________________________________________</a:t>
             </a:r>
           </a:p>
           <a:p>
@@ -7486,7 +7511,8 @@
               <a:rPr>
                 <a:latin typeface="Courier"/>
               </a:rPr>
-              <a:t>Middle line: ________________________
+              <a:t>
+Middle line: ________________________
 Box edges:   ________________________</a:t>
             </a:r>
           </a:p>
@@ -7890,6 +7916,9 @@
               </a:rPr>
               <a:t># Write your code here:</a:t>
             </a:r>
+            <a:br/>
+            <a:br/>
+            <a:br/>
           </a:p>
           <a:p>
             <a:pPr lvl="0" indent="0">
@@ -7899,7 +7928,9 @@
               <a:rPr>
                 <a:latin typeface="Courier"/>
               </a:rPr>
-              <a:t>Which is better and why: ________________________</a:t>
+              <a:t>
+Which is better and why: __________________________________________________________________
+___________________________________________________________________________________________</a:t>
             </a:r>
           </a:p>
           <a:p>
@@ -8426,6 +8457,8 @@
               </a:rPr>
               <a:t># Write your code here:</a:t>
             </a:r>
+            <a:br/>
+            <a:br/>
           </a:p>
           <a:p>
             <a:pPr lvl="0" indent="0" marL="0">
@@ -8492,7 +8525,9 @@
               <a:rPr>
                 <a:latin typeface="Courier"/>
               </a:rPr>
-              <a:t>________________________________________________________</a:t>
+              <a:t>
+_____________________________________________________________________________________
+_____________________________________________________________________________________</a:t>
             </a:r>
           </a:p>
         </p:txBody>
@@ -9177,6 +9212,9 @@
               </a:rPr>
               <a:t># Write your code here:</a:t>
             </a:r>
+            <a:br/>
+            <a:br/>
+            <a:br/>
           </a:p>
         </p:txBody>
       </p:sp>
@@ -9691,6 +9729,9 @@
               </a:rPr>
               <a:t># Write your code here:</a:t>
             </a:r>
+            <a:br/>
+            <a:br/>
+            <a:br/>
           </a:p>
           <a:p>
             <a:pPr lvl="0" indent="0" marL="0">
@@ -10047,8 +10088,13 @@
             </a:r>
             <a:r>
               <a:rPr/>
-              <a:t> Do the shady and sunny density curves look like they overlap a lot, or are they clearly separated? </a:t>
-            </a:r>
+              <a:t> Do the shady and sunny density curves look like they overlap a lot, or are they clearly separated?</a:t>
+            </a:r>
+          </a:p>
+          <a:p>
+            <a:pPr lvl="0" indent="0" marL="0">
+              <a:buNone/>
+            </a:pPr>
             <a:r>
               <a:rPr>
                 <a:latin typeface="Courier"/>
@@ -11036,7 +11082,8 @@
               <a:rPr>
                 <a:latin typeface="Courier"/>
               </a:rPr>
-              <a:t>Mean point:   ________________________
+              <a:t>
+Mean point:   ________________________
 SE bars:      ________________________</a:t>
             </a:r>
           </a:p>
